--- a/Notification_Hub_포트폴리오.pptx
+++ b/Notification_Hub_포트폴리오.pptx
@@ -4,25 +4,22 @@
   <p:sldMasterIdLst>
     <p:sldMasterId id="2147483648" r:id="rId1"/>
   </p:sldMasterIdLst>
-  <p:notesMasterIdLst>
-    <p:notesMasterId r:id="rId15"/>
-  </p:notesMasterIdLst>
   <p:sldIdLst>
-    <p:sldId id="256" r:id="rId2"/>
-    <p:sldId id="257" r:id="rId3"/>
-    <p:sldId id="258" r:id="rId4"/>
-    <p:sldId id="259" r:id="rId5"/>
-    <p:sldId id="260" r:id="rId6"/>
-    <p:sldId id="261" r:id="rId7"/>
-    <p:sldId id="262" r:id="rId8"/>
-    <p:sldId id="263" r:id="rId9"/>
-    <p:sldId id="264" r:id="rId10"/>
-    <p:sldId id="265" r:id="rId11"/>
-    <p:sldId id="266" r:id="rId12"/>
-    <p:sldId id="267" r:id="rId13"/>
-    <p:sldId id="268" r:id="rId14"/>
+    <p:sldId id="256" r:id="rId7"/>
+    <p:sldId id="257" r:id="rId8"/>
+    <p:sldId id="258" r:id="rId9"/>
+    <p:sldId id="259" r:id="rId10"/>
+    <p:sldId id="260" r:id="rId11"/>
+    <p:sldId id="261" r:id="rId12"/>
+    <p:sldId id="262" r:id="rId13"/>
+    <p:sldId id="263" r:id="rId14"/>
+    <p:sldId id="264" r:id="rId15"/>
+    <p:sldId id="265" r:id="rId16"/>
+    <p:sldId id="266" r:id="rId17"/>
+    <p:sldId id="267" r:id="rId18"/>
+    <p:sldId id="268" r:id="rId19"/>
   </p:sldIdLst>
-  <p:sldSz cx="12192000" cy="6858000"/>
+  <p:sldSz cx="12191695" cy="6858000" type="screen4x3"/>
   <p:notesSz cx="6858000" cy="9144000"/>
   <p:defaultTextStyle>
     <a:defPPr>
@@ -119,39 +116,18 @@
       </a:defRPr>
     </a:lvl9pPr>
   </p:defaultTextStyle>
-  <p:extLst>
-    <p:ext uri="{EFAFB233-063F-42B5-8137-9DF3F51BA10A}">
-      <p15:sldGuideLst xmlns:p15="http://schemas.microsoft.com/office/powerpoint/2012/main">
-        <p15:guide id="1" orient="horz" pos="2160">
-          <p15:clr>
-            <a:srgbClr val="A4A3A4"/>
-          </p15:clr>
-        </p15:guide>
-        <p15:guide id="2" pos="2880">
-          <p15:clr>
-            <a:srgbClr val="A4A3A4"/>
-          </p15:clr>
-        </p15:guide>
-      </p15:sldGuideLst>
-    </p:ext>
-  </p:extLst>
 </p:presentation>
 </file>
 
 <file path=ppt/charts/chart1.xml><?xml version="1.0" encoding="utf-8"?>
-<c:chartSpace xmlns:c="http://schemas.openxmlformats.org/drawingml/2006/chart" xmlns:a="http://schemas.openxmlformats.org/drawingml/2006/main" xmlns:r="http://schemas.openxmlformats.org/officeDocument/2006/relationships" xmlns:c16r2="http://schemas.microsoft.com/office/drawing/2015/06/chart">
+<c:chartSpace xmlns:c="http://schemas.openxmlformats.org/drawingml/2006/chart" xmlns:a="http://schemas.openxmlformats.org/drawingml/2006/main" xmlns:r="http://schemas.openxmlformats.org/officeDocument/2006/relationships">
   <c:date1904 val="0"/>
-  <c:lang val="ko-KR"/>
-  <c:roundedCorners val="1"/>
-  <c:style val="2"/>
   <c:chart>
     <c:autoTitleDeleted val="1"/>
     <c:plotArea>
-      <c:layout/>
       <c:barChart>
         <c:barDir val="col"/>
         <c:grouping val="clustered"/>
-        <c:varyColors val="1"/>
         <c:ser>
           <c:idx val="0"/>
           <c:order val="0"/>
@@ -171,44 +147,6 @@
               <a:srgbClr val="D97757"/>
             </a:solidFill>
           </c:spPr>
-          <c:invertIfNegative val="1"/>
-          <c:dLbls>
-            <c:numFmt formatCode="0.0" sourceLinked="0"/>
-            <c:spPr>
-              <a:noFill/>
-              <a:ln>
-                <a:noFill/>
-              </a:ln>
-              <a:effectLst/>
-            </c:spPr>
-            <c:txPr>
-              <a:bodyPr/>
-              <a:lstStyle/>
-              <a:p>
-                <a:pPr>
-                  <a:defRPr sz="1100" b="1">
-                    <a:solidFill>
-                      <a:srgbClr val="201F1B"/>
-                    </a:solidFill>
-                    <a:latin typeface="Apple SD Gothic Neo"/>
-                  </a:defRPr>
-                </a:pPr>
-                <a:endParaRPr lang="ko-KR"/>
-              </a:p>
-            </c:txPr>
-            <c:showLegendKey val="0"/>
-            <c:showVal val="1"/>
-            <c:showCatName val="0"/>
-            <c:showSerName val="0"/>
-            <c:showPercent val="0"/>
-            <c:showBubbleSize val="0"/>
-            <c:showLeaderLines val="0"/>
-            <c:extLst>
-              <c:ext xmlns:c15="http://schemas.microsoft.com/office/drawing/2012/chart" uri="{CE6537A1-D6FC-4f65-9D91-7224C49458BB}">
-                <c15:showLeaderLines val="0"/>
-              </c:ext>
-            </c:extLst>
-          </c:dLbls>
           <c:cat>
             <c:strRef>
               <c:f>Sheet1!$A$2:$A$5</c:f>
@@ -236,7 +174,7 @@
                 <c:formatCode>General</c:formatCode>
                 <c:ptCount val="4"/>
                 <c:pt idx="0">
-                  <c:v>90</c:v>
+                  <c:v>90.0</c:v>
                 </c:pt>
                 <c:pt idx="1">
                   <c:v>83.5</c:v>
@@ -250,28 +188,30 @@
               </c:numCache>
             </c:numRef>
           </c:val>
-          <c:extLst>
-            <c:ext xmlns:c14="http://schemas.microsoft.com/office/drawing/2007/8/2/chart" uri="{6F2FDCE9-48DA-4B69-8628-5D25D57E5C99}">
-              <c14:invertSolidFillFmt>
-                <c14:spPr xmlns:c14="http://schemas.microsoft.com/office/drawing/2007/8/2/chart">
-                  <a:solidFill>
-                    <a:srgbClr val="FFFFFF"/>
-                  </a:solidFill>
-                </c14:spPr>
-              </c14:invertSolidFillFmt>
-            </c:ext>
-            <c:ext xmlns:c16="http://schemas.microsoft.com/office/drawing/2014/chart" uri="{C3380CC4-5D6E-409C-BE32-E72D297353CC}">
-              <c16:uniqueId val="{00000000-6932-104E-A410-34870866D8AA}"/>
-            </c:ext>
-          </c:extLst>
         </c:ser>
         <c:dLbls>
+          <c:numFmt formatCode="0.0" sourceLinked="0"/>
+          <c:txPr>
+            <a:bodyPr/>
+            <a:lstStyle/>
+            <a:p>
+              <a:pPr>
+                <a:defRPr sz="1100" b="1">
+                  <a:solidFill>
+                    <a:srgbClr val="201F1B"/>
+                  </a:solidFill>
+                  <a:latin typeface="Apple SD Gothic Neo"/>
+                </a:defRPr>
+              </a:pPr>
+            </a:p>
+          </c:txPr>
           <c:showLegendKey val="0"/>
           <c:showVal val="1"/>
           <c:showCatName val="0"/>
           <c:showSerName val="0"/>
           <c:showPercent val="0"/>
           <c:showBubbleSize val="0"/>
+          <c:showLeaderLines val="1"/>
         </c:dLbls>
         <c:gapWidth val="70"/>
         <c:axId val="-2068027336"/>
@@ -284,7 +224,6 @@
         </c:scaling>
         <c:delete val="0"/>
         <c:axPos val="b"/>
-        <c:numFmt formatCode="General" sourceLinked="0"/>
         <c:majorTickMark val="out"/>
         <c:minorTickMark val="none"/>
         <c:tickLblPos val="nextTo"/>
@@ -307,7 +246,6 @@
                 <a:latin typeface="Apple SD Gothic Neo"/>
               </a:defRPr>
             </a:pPr>
-            <a:endParaRPr lang="ko-KR"/>
           </a:p>
         </c:txPr>
         <c:crossAx val="-2113994440"/>
@@ -320,9 +258,8 @@
       <c:valAx>
         <c:axId val="-2113994440"/>
         <c:scaling>
-          <c:orientation val="minMax"/>
-          <c:max val="100"/>
-          <c:min val="0"/>
+          <c:max val="100.0"/>
+          <c:min val="0.0"/>
         </c:scaling>
         <c:delete val="0"/>
         <c:axPos val="l"/>
@@ -335,7 +272,6 @@
             </a:ln>
           </c:spPr>
         </c:majorGridlines>
-        <c:numFmt formatCode="General" sourceLinked="1"/>
         <c:majorTickMark val="out"/>
         <c:minorTickMark val="none"/>
         <c:tickLblPos val="nextTo"/>
@@ -357,17 +293,13 @@
                 </a:solidFill>
               </a:defRPr>
             </a:pPr>
-            <a:endParaRPr lang="ko-KR"/>
           </a:p>
         </c:txPr>
         <c:crossAx val="-2068027336"/>
         <c:crosses val="autoZero"/>
-        <c:crossBetween val="between"/>
       </c:valAx>
     </c:plotArea>
-    <c:plotVisOnly val="1"/>
     <c:dispBlanksAs val="gap"/>
-    <c:showDLblsOverMax val="1"/>
   </c:chart>
   <c:txPr>
     <a:bodyPr/>
@@ -376,7 +308,7 @@
       <a:pPr>
         <a:defRPr sz="1800"/>
       </a:pPr>
-      <a:endParaRPr lang="ko-KR"/>
+      <a:endParaRPr lang="en-US"/>
     </a:p>
   </c:txPr>
   <c:externalData r:id="rId1">
@@ -386,7 +318,7 @@
 </file>
 
 <file path=ppt/notesMasters/notesMaster1.xml><?xml version="1.0" encoding="utf-8"?>
-<p:notesMaster xmlns:a="http://schemas.openxmlformats.org/drawingml/2006/main" xmlns:r="http://schemas.openxmlformats.org/officeDocument/2006/relationships" xmlns:p="http://schemas.openxmlformats.org/presentationml/2006/main">
+<p:notesMaster xmlns:a="http://schemas.openxmlformats.org/drawingml/2006/main" xmlns:p="http://schemas.openxmlformats.org/presentationml/2006/main" xmlns:r="http://schemas.openxmlformats.org/officeDocument/2006/relationships">
   <p:cSld>
     <p:bg>
       <p:bgRef idx="1001">
@@ -409,7 +341,7 @@
       </p:grpSpPr>
       <p:sp>
         <p:nvSpPr>
-          <p:cNvPr id="2" name="머리글 개체 틀 1"/>
+          <p:cNvPr id="2" name="Header Placeholder 1"/>
           <p:cNvSpPr>
             <a:spLocks noGrp="1"/>
           </p:cNvSpPr>
@@ -420,7 +352,7 @@
         <p:spPr>
           <a:xfrm>
             <a:off x="0" y="0"/>
-            <a:ext cx="2971800" cy="458788"/>
+            <a:ext cx="2971800" cy="457200"/>
           </a:xfrm>
           <a:prstGeom prst="rect">
             <a:avLst/>
@@ -434,13 +366,13 @@
             </a:lvl1pPr>
           </a:lstStyle>
           <a:p>
-            <a:endParaRPr kumimoji="1" lang="ko-KR" altLang="en-US"/>
-          </a:p>
-        </p:txBody>
-      </p:sp>
-      <p:sp>
-        <p:nvSpPr>
-          <p:cNvPr id="3" name="날짜 개체 틀 2"/>
+            <a:endParaRPr lang="en-US"/>
+          </a:p>
+        </p:txBody>
+      </p:sp>
+      <p:sp>
+        <p:nvSpPr>
+          <p:cNvPr id="3" name="Date Placeholder 2"/>
           <p:cNvSpPr>
             <a:spLocks noGrp="1"/>
           </p:cNvSpPr>
@@ -451,7 +383,7 @@
         <p:spPr>
           <a:xfrm>
             <a:off x="3884613" y="0"/>
-            <a:ext cx="2971800" cy="458788"/>
+            <a:ext cx="2971800" cy="457200"/>
           </a:xfrm>
           <a:prstGeom prst="rect">
             <a:avLst/>
@@ -465,17 +397,17 @@
             </a:lvl1pPr>
           </a:lstStyle>
           <a:p>
-            <a:fld id="{A21B99B9-E4FF-CB41-BEE4-C666CF56D69E}" type="datetimeFigureOut">
-              <a:rPr kumimoji="1" lang="ko-KR" altLang="en-US" smtClean="0"/>
-              <a:t>2026. 6. 5.</a:t>
+            <a:fld id="{0F89C1C7-3DCD-1040-A9CF-14679D8B5DDD}" type="datetimeFigureOut">
+              <a:rPr lang="en-US" smtClean="0"/>
+              <a:t>10/17/16</a:t>
             </a:fld>
-            <a:endParaRPr kumimoji="1" lang="ko-KR" altLang="en-US"/>
-          </a:p>
-        </p:txBody>
-      </p:sp>
-      <p:sp>
-        <p:nvSpPr>
-          <p:cNvPr id="4" name="슬라이드 이미지 개체 틀 3"/>
+            <a:endParaRPr lang="en-US"/>
+          </a:p>
+        </p:txBody>
+      </p:sp>
+      <p:sp>
+        <p:nvSpPr>
+          <p:cNvPr id="4" name="Slide Image Placeholder 3"/>
           <p:cNvSpPr>
             <a:spLocks noGrp="1" noRot="1" noChangeAspect="1"/>
           </p:cNvSpPr>
@@ -485,8 +417,8 @@
         </p:nvSpPr>
         <p:spPr>
           <a:xfrm>
-            <a:off x="685800" y="1143000"/>
-            <a:ext cx="5486400" cy="3086100"/>
+            <a:off x="1143000" y="685800"/>
+            <a:ext cx="4572000" cy="3429000"/>
           </a:xfrm>
           <a:prstGeom prst="rect">
             <a:avLst/>
@@ -502,13 +434,13 @@
           <a:bodyPr vert="horz" lIns="91440" tIns="45720" rIns="91440" bIns="45720" rtlCol="0" anchor="ctr"/>
           <a:lstStyle/>
           <a:p>
-            <a:endParaRPr lang="ko-KR" altLang="en-US"/>
-          </a:p>
-        </p:txBody>
-      </p:sp>
-      <p:sp>
-        <p:nvSpPr>
-          <p:cNvPr id="5" name="슬라이드 노트 개체 틀 4"/>
+            <a:endParaRPr lang="en-US"/>
+          </a:p>
+        </p:txBody>
+      </p:sp>
+      <p:sp>
+        <p:nvSpPr>
+          <p:cNvPr id="5" name="Notes Placeholder 4"/>
           <p:cNvSpPr>
             <a:spLocks noGrp="1"/>
           </p:cNvSpPr>
@@ -518,8 +450,8 @@
         </p:nvSpPr>
         <p:spPr>
           <a:xfrm>
-            <a:off x="685800" y="4400550"/>
-            <a:ext cx="5486400" cy="3600450"/>
+            <a:off x="685800" y="4343400"/>
+            <a:ext cx="5486400" cy="4114800"/>
           </a:xfrm>
           <a:prstGeom prst="rect">
             <a:avLst/>
@@ -531,43 +463,44 @@
           <a:p>
             <a:pPr lvl="0"/>
             <a:r>
-              <a:rPr kumimoji="1" lang="ko-KR" altLang="en-US"/>
-              <a:t>마스터 텍스트 스타일을 편집하려면 클릭</a:t>
+              <a:rPr lang="en-US" smtClean="0"/>
+              <a:t>Click to edit Master text styles</a:t>
             </a:r>
           </a:p>
           <a:p>
             <a:pPr lvl="1"/>
             <a:r>
-              <a:rPr kumimoji="1" lang="ko-KR" altLang="en-US"/>
-              <a:t>두 번째 수준</a:t>
+              <a:rPr lang="en-US" smtClean="0"/>
+              <a:t>Second level</a:t>
             </a:r>
           </a:p>
           <a:p>
             <a:pPr lvl="2"/>
             <a:r>
-              <a:rPr kumimoji="1" lang="ko-KR" altLang="en-US"/>
-              <a:t>세 번째 수준</a:t>
+              <a:rPr lang="en-US" smtClean="0"/>
+              <a:t>Third level</a:t>
             </a:r>
           </a:p>
           <a:p>
             <a:pPr lvl="3"/>
             <a:r>
-              <a:rPr kumimoji="1" lang="ko-KR" altLang="en-US"/>
-              <a:t>네 번째 수준</a:t>
+              <a:rPr lang="en-US" smtClean="0"/>
+              <a:t>Fourth level</a:t>
             </a:r>
           </a:p>
           <a:p>
             <a:pPr lvl="4"/>
             <a:r>
-              <a:rPr kumimoji="1" lang="ko-KR" altLang="en-US"/>
-              <a:t>다섯 번째 수준</a:t>
-            </a:r>
-          </a:p>
-        </p:txBody>
-      </p:sp>
-      <p:sp>
-        <p:nvSpPr>
-          <p:cNvPr id="6" name="바닥글 개체 틀 5"/>
+              <a:rPr lang="en-US" smtClean="0"/>
+              <a:t>Fifth level</a:t>
+            </a:r>
+            <a:endParaRPr lang="en-US"/>
+          </a:p>
+        </p:txBody>
+      </p:sp>
+      <p:sp>
+        <p:nvSpPr>
+          <p:cNvPr id="6" name="Footer Placeholder 5"/>
           <p:cNvSpPr>
             <a:spLocks noGrp="1"/>
           </p:cNvSpPr>
@@ -578,7 +511,7 @@
         <p:spPr>
           <a:xfrm>
             <a:off x="0" y="8685213"/>
-            <a:ext cx="2971800" cy="458787"/>
+            <a:ext cx="2971800" cy="457200"/>
           </a:xfrm>
           <a:prstGeom prst="rect">
             <a:avLst/>
@@ -592,13 +525,13 @@
             </a:lvl1pPr>
           </a:lstStyle>
           <a:p>
-            <a:endParaRPr kumimoji="1" lang="ko-KR" altLang="en-US"/>
-          </a:p>
-        </p:txBody>
-      </p:sp>
-      <p:sp>
-        <p:nvSpPr>
-          <p:cNvPr id="7" name="슬라이드 번호 개체 틀 6"/>
+            <a:endParaRPr lang="en-US"/>
+          </a:p>
+        </p:txBody>
+      </p:sp>
+      <p:sp>
+        <p:nvSpPr>
+          <p:cNvPr id="7" name="Slide Number Placeholder 6"/>
           <p:cNvSpPr>
             <a:spLocks noGrp="1"/>
           </p:cNvSpPr>
@@ -609,7 +542,7 @@
         <p:spPr>
           <a:xfrm>
             <a:off x="3884613" y="8685213"/>
-            <a:ext cx="2971800" cy="458787"/>
+            <a:ext cx="2971800" cy="457200"/>
           </a:xfrm>
           <a:prstGeom prst="rect">
             <a:avLst/>
@@ -623,24 +556,24 @@
             </a:lvl1pPr>
           </a:lstStyle>
           <a:p>
-            <a:fld id="{CAF689AD-C111-104A-BE33-8E46D2C94058}" type="slidenum">
-              <a:rPr kumimoji="1" lang="ko-KR" altLang="en-US" smtClean="0"/>
+            <a:fld id="{BB5E49A5-4136-284D-997B-48E1D791AD67}" type="slidenum">
+              <a:rPr lang="en-US" smtClean="0"/>
               <a:t>‹#›</a:t>
             </a:fld>
-            <a:endParaRPr kumimoji="1" lang="ko-KR" altLang="en-US"/>
+            <a:endParaRPr lang="en-US"/>
           </a:p>
         </p:txBody>
       </p:sp>
     </p:spTree>
     <p:extLst>
       <p:ext uri="{BB962C8B-B14F-4D97-AF65-F5344CB8AC3E}">
-        <p14:creationId xmlns:p14="http://schemas.microsoft.com/office/powerpoint/2010/main" val="754299865"/>
+        <p14:creationId xmlns:p14="http://schemas.microsoft.com/office/powerpoint/2010/main" val="2623252185"/>
       </p:ext>
     </p:extLst>
   </p:cSld>
   <p:clrMap bg1="lt1" tx1="dk1" bg2="lt2" tx2="dk2" accent1="accent1" accent2="accent2" accent3="accent3" accent4="accent4" accent5="accent5" accent6="accent6" hlink="hlink" folHlink="folHlink"/>
   <p:notesStyle>
-    <a:lvl1pPr marL="0" algn="l" defTabSz="914400" rtl="0" eaLnBrk="1" latinLnBrk="1" hangingPunct="1">
+    <a:lvl1pPr marL="0" algn="l" defTabSz="457200" rtl="0" eaLnBrk="1" latinLnBrk="0" hangingPunct="1">
       <a:defRPr sz="1200" kern="1200">
         <a:solidFill>
           <a:schemeClr val="tx1"/>
@@ -650,7 +583,7 @@
         <a:cs typeface="+mn-cs"/>
       </a:defRPr>
     </a:lvl1pPr>
-    <a:lvl2pPr marL="457200" algn="l" defTabSz="914400" rtl="0" eaLnBrk="1" latinLnBrk="1" hangingPunct="1">
+    <a:lvl2pPr marL="457200" algn="l" defTabSz="457200" rtl="0" eaLnBrk="1" latinLnBrk="0" hangingPunct="1">
       <a:defRPr sz="1200" kern="1200">
         <a:solidFill>
           <a:schemeClr val="tx1"/>
@@ -660,7 +593,7 @@
         <a:cs typeface="+mn-cs"/>
       </a:defRPr>
     </a:lvl2pPr>
-    <a:lvl3pPr marL="914400" algn="l" defTabSz="914400" rtl="0" eaLnBrk="1" latinLnBrk="1" hangingPunct="1">
+    <a:lvl3pPr marL="914400" algn="l" defTabSz="457200" rtl="0" eaLnBrk="1" latinLnBrk="0" hangingPunct="1">
       <a:defRPr sz="1200" kern="1200">
         <a:solidFill>
           <a:schemeClr val="tx1"/>
@@ -670,7 +603,7 @@
         <a:cs typeface="+mn-cs"/>
       </a:defRPr>
     </a:lvl3pPr>
-    <a:lvl4pPr marL="1371600" algn="l" defTabSz="914400" rtl="0" eaLnBrk="1" latinLnBrk="1" hangingPunct="1">
+    <a:lvl4pPr marL="1371600" algn="l" defTabSz="457200" rtl="0" eaLnBrk="1" latinLnBrk="0" hangingPunct="1">
       <a:defRPr sz="1200" kern="1200">
         <a:solidFill>
           <a:schemeClr val="tx1"/>
@@ -680,7 +613,7 @@
         <a:cs typeface="+mn-cs"/>
       </a:defRPr>
     </a:lvl4pPr>
-    <a:lvl5pPr marL="1828800" algn="l" defTabSz="914400" rtl="0" eaLnBrk="1" latinLnBrk="1" hangingPunct="1">
+    <a:lvl5pPr marL="1828800" algn="l" defTabSz="457200" rtl="0" eaLnBrk="1" latinLnBrk="0" hangingPunct="1">
       <a:defRPr sz="1200" kern="1200">
         <a:solidFill>
           <a:schemeClr val="tx1"/>
@@ -690,7 +623,7 @@
         <a:cs typeface="+mn-cs"/>
       </a:defRPr>
     </a:lvl5pPr>
-    <a:lvl6pPr marL="2286000" algn="l" defTabSz="914400" rtl="0" eaLnBrk="1" latinLnBrk="1" hangingPunct="1">
+    <a:lvl6pPr marL="2286000" algn="l" defTabSz="457200" rtl="0" eaLnBrk="1" latinLnBrk="0" hangingPunct="1">
       <a:defRPr sz="1200" kern="1200">
         <a:solidFill>
           <a:schemeClr val="tx1"/>
@@ -700,7 +633,7 @@
         <a:cs typeface="+mn-cs"/>
       </a:defRPr>
     </a:lvl6pPr>
-    <a:lvl7pPr marL="2743200" algn="l" defTabSz="914400" rtl="0" eaLnBrk="1" latinLnBrk="1" hangingPunct="1">
+    <a:lvl7pPr marL="2743200" algn="l" defTabSz="457200" rtl="0" eaLnBrk="1" latinLnBrk="0" hangingPunct="1">
       <a:defRPr sz="1200" kern="1200">
         <a:solidFill>
           <a:schemeClr val="tx1"/>
@@ -710,7 +643,7 @@
         <a:cs typeface="+mn-cs"/>
       </a:defRPr>
     </a:lvl7pPr>
-    <a:lvl8pPr marL="3200400" algn="l" defTabSz="914400" rtl="0" eaLnBrk="1" latinLnBrk="1" hangingPunct="1">
+    <a:lvl8pPr marL="3200400" algn="l" defTabSz="457200" rtl="0" eaLnBrk="1" latinLnBrk="0" hangingPunct="1">
       <a:defRPr sz="1200" kern="1200">
         <a:solidFill>
           <a:schemeClr val="tx1"/>
@@ -720,7 +653,7 @@
         <a:cs typeface="+mn-cs"/>
       </a:defRPr>
     </a:lvl8pPr>
-    <a:lvl9pPr marL="3657600" algn="l" defTabSz="914400" rtl="0" eaLnBrk="1" latinLnBrk="1" hangingPunct="1">
+    <a:lvl9pPr marL="3657600" algn="l" defTabSz="457200" rtl="0" eaLnBrk="1" latinLnBrk="0" hangingPunct="1">
       <a:defRPr sz="1200" kern="1200">
         <a:solidFill>
           <a:schemeClr val="tx1"/>
@@ -735,7 +668,7 @@
 </file>
 
 <file path=ppt/notesSlides/notesSlide1.xml><?xml version="1.0" encoding="utf-8"?>
-<p:notes xmlns:a="http://schemas.openxmlformats.org/drawingml/2006/main" xmlns:r="http://schemas.openxmlformats.org/officeDocument/2006/relationships" xmlns:p="http://schemas.openxmlformats.org/presentationml/2006/main">
+<p:notes xmlns:a="http://schemas.openxmlformats.org/drawingml/2006/main" xmlns:p="http://schemas.openxmlformats.org/presentationml/2006/main" xmlns:r="http://schemas.openxmlformats.org/officeDocument/2006/relationships">
   <p:cSld>
     <p:spTree>
       <p:nvGrpSpPr>
@@ -755,7 +688,7 @@
         <p:nvSpPr>
           <p:cNvPr id="2" name="Slide Image Placeholder 1"/>
           <p:cNvSpPr>
-            <a:spLocks noGrp="1" noRot="1" noChangeAspect="1"/>
+            <a:spLocks noGrp="1"/>
           </p:cNvSpPr>
           <p:nvPr>
             <p:ph type="sldImg" idx="2"/>
@@ -770,7 +703,7 @@
             <a:spLocks noGrp="1"/>
           </p:cNvSpPr>
           <p:nvPr>
-            <p:ph type="body" sz="quarter" idx="3"/>
+            <p:ph type="body" idx="3" sz="quarter"/>
           </p:nvPr>
         </p:nvSpPr>
         <p:spPr/>
@@ -779,7 +712,7 @@
           <a:lstStyle/>
           <a:p>
             <a:r>
-              <a:t>도입부에서 '왜 만들었는가'를 공감시키는 슬라이드입니다. 알림은 거의 모든 서비스가 필요로 하지만 재시도·통계·멀티채널을 제대로 구현하려면 부담이 큽니다. 채널 실제 연동(SendGrid/Twilio/FCM)은 스텁이며 아키텍처 설계에 집중했다는 점을 솔직히 밝힙니다.</a:t>
+              <a:t>도입부에서 '왜 만들었는가'를 공감시키는 슬라이드입니다. 알림은 거의 모든 서비스가 필요로 하지만 재시도·통계·멀티채널을 제대로 구현하려면 부담이 큽니다. SendGrid EMAIL과 Android FCM은 실제 발송까지 검증했고, Twilio 실제 발송과 iOS APNs 연동은 후속 범위로 남아 있습니다.</a:t>
             </a:r>
           </a:p>
         </p:txBody>
@@ -791,7 +724,7 @@
             <a:spLocks noGrp="1"/>
           </p:cNvSpPr>
           <p:nvPr>
-            <p:ph type="sldNum" sz="quarter" idx="5"/>
+            <p:ph type="sldNum" idx="5" sz="quarter"/>
           </p:nvPr>
         </p:nvSpPr>
         <p:spPr/>
@@ -805,7 +738,7 @@
 </file>
 
 <file path=ppt/notesSlides/notesSlide2.xml><?xml version="1.0" encoding="utf-8"?>
-<p:notes xmlns:a="http://schemas.openxmlformats.org/drawingml/2006/main" xmlns:r="http://schemas.openxmlformats.org/officeDocument/2006/relationships" xmlns:p="http://schemas.openxmlformats.org/presentationml/2006/main">
+<p:notes xmlns:a="http://schemas.openxmlformats.org/drawingml/2006/main" xmlns:p="http://schemas.openxmlformats.org/presentationml/2006/main" xmlns:r="http://schemas.openxmlformats.org/officeDocument/2006/relationships">
   <p:cSld>
     <p:spTree>
       <p:nvGrpSpPr>
@@ -825,7 +758,7 @@
         <p:nvSpPr>
           <p:cNvPr id="2" name="Slide Image Placeholder 1"/>
           <p:cNvSpPr>
-            <a:spLocks noGrp="1" noRot="1" noChangeAspect="1"/>
+            <a:spLocks noGrp="1"/>
           </p:cNvSpPr>
           <p:nvPr>
             <p:ph type="sldImg" idx="2"/>
@@ -840,7 +773,7 @@
             <a:spLocks noGrp="1"/>
           </p:cNvSpPr>
           <p:nvPr>
-            <p:ph type="body" sz="quarter" idx="3"/>
+            <p:ph type="body" idx="3" sz="quarter"/>
           </p:nvPr>
         </p:nvSpPr>
         <p:spPr/>
@@ -861,7 +794,7 @@
             <a:spLocks noGrp="1"/>
           </p:cNvSpPr>
           <p:nvPr>
-            <p:ph type="sldNum" sz="quarter" idx="5"/>
+            <p:ph type="sldNum" idx="5" sz="quarter"/>
           </p:nvPr>
         </p:nvSpPr>
         <p:spPr/>
@@ -875,7 +808,7 @@
 </file>
 
 <file path=ppt/notesSlides/notesSlide3.xml><?xml version="1.0" encoding="utf-8"?>
-<p:notes xmlns:a="http://schemas.openxmlformats.org/drawingml/2006/main" xmlns:r="http://schemas.openxmlformats.org/officeDocument/2006/relationships" xmlns:p="http://schemas.openxmlformats.org/presentationml/2006/main">
+<p:notes xmlns:a="http://schemas.openxmlformats.org/drawingml/2006/main" xmlns:p="http://schemas.openxmlformats.org/presentationml/2006/main" xmlns:r="http://schemas.openxmlformats.org/officeDocument/2006/relationships">
   <p:cSld>
     <p:spTree>
       <p:nvGrpSpPr>
@@ -895,7 +828,7 @@
         <p:nvSpPr>
           <p:cNvPr id="2" name="Slide Image Placeholder 1"/>
           <p:cNvSpPr>
-            <a:spLocks noGrp="1" noRot="1" noChangeAspect="1"/>
+            <a:spLocks noGrp="1"/>
           </p:cNvSpPr>
           <p:nvPr>
             <p:ph type="sldImg" idx="2"/>
@@ -910,7 +843,7 @@
             <a:spLocks noGrp="1"/>
           </p:cNvSpPr>
           <p:nvPr>
-            <p:ph type="body" sz="quarter" idx="3"/>
+            <p:ph type="body" idx="3" sz="quarter"/>
           </p:nvPr>
         </p:nvSpPr>
         <p:spPr/>
@@ -919,7 +852,7 @@
           <a:lstStyle/>
           <a:p>
             <a:r>
-              <a:t>동기 호출이 아니라 이벤트로 단계를 분리한 이유를 설명합니다. 발송 채널이 느리거나 장애여도 고객사는 접수 응답을 즉시 받습니다. 파티션 3개로 발송을 병렬 처리하고, Zipkin으로 Kafka 구간까지 추적합니다.</a:t>
+              <a:t>접수와 발송 결과를 각각 Outbox에 같은 DB 트랜잭션으로 저장합니다. dispatcher가 pending 행을 Kafka로 재발행하므로 Kafka 발행 실패가 provider 발송 재시도로 이어지지 않습니다. 이 구조는 at-least-once를 전제로 downstream 멱등성을 함께 설명합니다.</a:t>
             </a:r>
           </a:p>
         </p:txBody>
@@ -931,7 +864,7 @@
             <a:spLocks noGrp="1"/>
           </p:cNvSpPr>
           <p:nvPr>
-            <p:ph type="sldNum" sz="quarter" idx="5"/>
+            <p:ph type="sldNum" idx="5" sz="quarter"/>
           </p:nvPr>
         </p:nvSpPr>
         <p:spPr/>
@@ -945,7 +878,7 @@
 </file>
 
 <file path=ppt/notesSlides/notesSlide4.xml><?xml version="1.0" encoding="utf-8"?>
-<p:notes xmlns:a="http://schemas.openxmlformats.org/drawingml/2006/main" xmlns:r="http://schemas.openxmlformats.org/officeDocument/2006/relationships" xmlns:p="http://schemas.openxmlformats.org/presentationml/2006/main">
+<p:notes xmlns:a="http://schemas.openxmlformats.org/drawingml/2006/main" xmlns:p="http://schemas.openxmlformats.org/presentationml/2006/main" xmlns:r="http://schemas.openxmlformats.org/officeDocument/2006/relationships">
   <p:cSld>
     <p:spTree>
       <p:nvGrpSpPr>
@@ -965,7 +898,7 @@
         <p:nvSpPr>
           <p:cNvPr id="2" name="Slide Image Placeholder 1"/>
           <p:cNvSpPr>
-            <a:spLocks noGrp="1" noRot="1" noChangeAspect="1"/>
+            <a:spLocks noGrp="1"/>
           </p:cNvSpPr>
           <p:nvPr>
             <p:ph type="sldImg" idx="2"/>
@@ -980,7 +913,7 @@
             <a:spLocks noGrp="1"/>
           </p:cNvSpPr>
           <p:nvPr>
-            <p:ph type="body" sz="quarter" idx="3"/>
+            <p:ph type="body" idx="3" sz="quarter"/>
           </p:nvPr>
         </p:nvSpPr>
         <p:spPr/>
@@ -989,7 +922,7 @@
           <a:lstStyle/>
           <a:p>
             <a:r>
-              <a:t>기술 면접관이 가장 주목할 부분입니다. 멱등성으로 중복을 흡수하고, 재시도·DLQ로 유실을 막고, Circuit Breaker로 장애 전파를 차단했습니다. 통계 집계 동시성 버그를 read-modify-write에서 MongoDB 원자적 연산으로 바꾼 경험도 함께 언급합니다.</a:t>
+              <a:t>기술 면접관이 가장 주목할 부분입니다. notification Outbox와 delivery-result Outbox가 DB 저장과 이벤트 발행 사이의 간격을 줄입니다. Redis 멱등성, delivery_logs의 notification_id unique 제약, 재시도·DLQ, Circuit Breaker가 함께 중복과 장애 전파를 관리합니다.</a:t>
             </a:r>
           </a:p>
         </p:txBody>
@@ -1001,7 +934,7 @@
             <a:spLocks noGrp="1"/>
           </p:cNvSpPr>
           <p:nvPr>
-            <p:ph type="sldNum" sz="quarter" idx="5"/>
+            <p:ph type="sldNum" idx="5" sz="quarter"/>
           </p:nvPr>
         </p:nvSpPr>
         <p:spPr/>
@@ -1015,7 +948,7 @@
 </file>
 
 <file path=ppt/notesSlides/notesSlide5.xml><?xml version="1.0" encoding="utf-8"?>
-<p:notes xmlns:a="http://schemas.openxmlformats.org/drawingml/2006/main" xmlns:r="http://schemas.openxmlformats.org/officeDocument/2006/relationships" xmlns:p="http://schemas.openxmlformats.org/presentationml/2006/main">
+<p:notes xmlns:a="http://schemas.openxmlformats.org/drawingml/2006/main" xmlns:p="http://schemas.openxmlformats.org/presentationml/2006/main" xmlns:r="http://schemas.openxmlformats.org/officeDocument/2006/relationships">
   <p:cSld>
     <p:spTree>
       <p:nvGrpSpPr>
@@ -1035,7 +968,7 @@
         <p:nvSpPr>
           <p:cNvPr id="2" name="Slide Image Placeholder 1"/>
           <p:cNvSpPr>
-            <a:spLocks noGrp="1" noRot="1" noChangeAspect="1"/>
+            <a:spLocks noGrp="1"/>
           </p:cNvSpPr>
           <p:nvPr>
             <p:ph type="sldImg" idx="2"/>
@@ -1050,7 +983,7 @@
             <a:spLocks noGrp="1"/>
           </p:cNvSpPr>
           <p:nvPr>
-            <p:ph type="body" sz="quarter" idx="3"/>
+            <p:ph type="body" idx="3" sz="quarter"/>
           </p:nvPr>
         </p:nvSpPr>
         <p:spPr/>
@@ -1059,7 +992,7 @@
           <a:lstStyle/>
           <a:p>
             <a:r>
-              <a:t>기능 구현으로 끝내지 않고 '운영'까지 고려했음을 보여줍니다. 커버리지 수치는 도메인·애플리케이션 계층 기준이며, 비즈니스 로직이 프레임워크와 분리되어 높은 커버리지가 가능했다는 점을 Clean Architecture 효과와 연결합니다.</a:t>
+              <a:t>운영 근거는 Outbox backlog·발행 실패 메트릭, 정적 및 live release gate, 격리 Compose 복구 리허설입니다. backup은 6초, clean restore는 17초였고, production smoke와 rollback 증적은 아직 별도 운영 과제입니다.</a:t>
             </a:r>
           </a:p>
         </p:txBody>
@@ -1071,7 +1004,7 @@
             <a:spLocks noGrp="1"/>
           </p:cNvSpPr>
           <p:nvPr>
-            <p:ph type="sldNum" sz="quarter" idx="5"/>
+            <p:ph type="sldNum" idx="5" sz="quarter"/>
           </p:nvPr>
         </p:nvSpPr>
         <p:spPr/>
@@ -1122,9 +1055,10 @@
           <a:lstStyle/>
           <a:p>
             <a:r>
-              <a:rPr lang="en-US"/>
+              <a:rPr lang="en-US" smtClean="0"/>
               <a:t>Click to edit Master title style</a:t>
             </a:r>
+            <a:endParaRPr lang="en-US"/>
           </a:p>
         </p:txBody>
       </p:sp>
@@ -1240,9 +1174,10 @@
           </a:lstStyle>
           <a:p>
             <a:r>
-              <a:rPr lang="en-US"/>
+              <a:rPr lang="en-US" smtClean="0"/>
               <a:t>Click to edit Master subtitle style</a:t>
             </a:r>
+            <a:endParaRPr lang="en-US"/>
           </a:p>
         </p:txBody>
       </p:sp>
@@ -1263,7 +1198,7 @@
           <a:p>
             <a:fld id="{5BCAD085-E8A6-8845-BD4E-CB4CCA059FC4}" type="datetimeFigureOut">
               <a:rPr lang="en-US" smtClean="0"/>
-              <a:t>6/5/26</a:t>
+              <a:t>1/27/13</a:t>
             </a:fld>
             <a:endParaRPr lang="en-US"/>
           </a:p>
@@ -1357,9 +1292,10 @@
           <a:lstStyle/>
           <a:p>
             <a:r>
-              <a:rPr lang="en-US"/>
+              <a:rPr lang="en-US" smtClean="0"/>
               <a:t>Click to edit Master title style</a:t>
             </a:r>
+            <a:endParaRPr lang="en-US"/>
           </a:p>
         </p:txBody>
       </p:sp>
@@ -1380,37 +1316,38 @@
           <a:p>
             <a:pPr lvl="0"/>
             <a:r>
-              <a:rPr lang="en-US"/>
+              <a:rPr lang="en-US" smtClean="0"/>
               <a:t>Click to edit Master text styles</a:t>
             </a:r>
           </a:p>
           <a:p>
             <a:pPr lvl="1"/>
             <a:r>
-              <a:rPr lang="en-US"/>
+              <a:rPr lang="en-US" smtClean="0"/>
               <a:t>Second level</a:t>
             </a:r>
           </a:p>
           <a:p>
             <a:pPr lvl="2"/>
             <a:r>
-              <a:rPr lang="en-US"/>
+              <a:rPr lang="en-US" smtClean="0"/>
               <a:t>Third level</a:t>
             </a:r>
           </a:p>
           <a:p>
             <a:pPr lvl="3"/>
             <a:r>
-              <a:rPr lang="en-US"/>
+              <a:rPr lang="en-US" smtClean="0"/>
               <a:t>Fourth level</a:t>
             </a:r>
           </a:p>
           <a:p>
             <a:pPr lvl="4"/>
             <a:r>
-              <a:rPr lang="en-US"/>
+              <a:rPr lang="en-US" smtClean="0"/>
               <a:t>Fifth level</a:t>
             </a:r>
+            <a:endParaRPr lang="en-US"/>
           </a:p>
         </p:txBody>
       </p:sp>
@@ -1431,7 +1368,7 @@
           <a:p>
             <a:fld id="{5BCAD085-E8A6-8845-BD4E-CB4CCA059FC4}" type="datetimeFigureOut">
               <a:rPr lang="en-US" smtClean="0"/>
-              <a:t>6/5/26</a:t>
+              <a:t>1/27/13</a:t>
             </a:fld>
             <a:endParaRPr lang="en-US"/>
           </a:p>
@@ -1530,9 +1467,10 @@
           <a:lstStyle/>
           <a:p>
             <a:r>
-              <a:rPr lang="en-US"/>
+              <a:rPr lang="en-US" smtClean="0"/>
               <a:t>Click to edit Master title style</a:t>
             </a:r>
+            <a:endParaRPr lang="en-US"/>
           </a:p>
         </p:txBody>
       </p:sp>
@@ -1558,37 +1496,38 @@
           <a:p>
             <a:pPr lvl="0"/>
             <a:r>
-              <a:rPr lang="en-US"/>
+              <a:rPr lang="en-US" smtClean="0"/>
               <a:t>Click to edit Master text styles</a:t>
             </a:r>
           </a:p>
           <a:p>
             <a:pPr lvl="1"/>
             <a:r>
-              <a:rPr lang="en-US"/>
+              <a:rPr lang="en-US" smtClean="0"/>
               <a:t>Second level</a:t>
             </a:r>
           </a:p>
           <a:p>
             <a:pPr lvl="2"/>
             <a:r>
-              <a:rPr lang="en-US"/>
+              <a:rPr lang="en-US" smtClean="0"/>
               <a:t>Third level</a:t>
             </a:r>
           </a:p>
           <a:p>
             <a:pPr lvl="3"/>
             <a:r>
-              <a:rPr lang="en-US"/>
+              <a:rPr lang="en-US" smtClean="0"/>
               <a:t>Fourth level</a:t>
             </a:r>
           </a:p>
           <a:p>
             <a:pPr lvl="4"/>
             <a:r>
-              <a:rPr lang="en-US"/>
+              <a:rPr lang="en-US" smtClean="0"/>
               <a:t>Fifth level</a:t>
             </a:r>
+            <a:endParaRPr lang="en-US"/>
           </a:p>
         </p:txBody>
       </p:sp>
@@ -1609,7 +1548,7 @@
           <a:p>
             <a:fld id="{5BCAD085-E8A6-8845-BD4E-CB4CCA059FC4}" type="datetimeFigureOut">
               <a:rPr lang="en-US" smtClean="0"/>
-              <a:t>6/5/26</a:t>
+              <a:t>1/27/13</a:t>
             </a:fld>
             <a:endParaRPr lang="en-US"/>
           </a:p>
@@ -1703,9 +1642,10 @@
           <a:lstStyle/>
           <a:p>
             <a:r>
-              <a:rPr lang="en-US"/>
+              <a:rPr lang="en-US" smtClean="0"/>
               <a:t>Click to edit Master title style</a:t>
             </a:r>
+            <a:endParaRPr lang="en-US"/>
           </a:p>
         </p:txBody>
       </p:sp>
@@ -1726,37 +1666,38 @@
           <a:p>
             <a:pPr lvl="0"/>
             <a:r>
-              <a:rPr lang="en-US"/>
+              <a:rPr lang="en-US" smtClean="0"/>
               <a:t>Click to edit Master text styles</a:t>
             </a:r>
           </a:p>
           <a:p>
             <a:pPr lvl="1"/>
             <a:r>
-              <a:rPr lang="en-US"/>
+              <a:rPr lang="en-US" smtClean="0"/>
               <a:t>Second level</a:t>
             </a:r>
           </a:p>
           <a:p>
             <a:pPr lvl="2"/>
             <a:r>
-              <a:rPr lang="en-US"/>
+              <a:rPr lang="en-US" smtClean="0"/>
               <a:t>Third level</a:t>
             </a:r>
           </a:p>
           <a:p>
             <a:pPr lvl="3"/>
             <a:r>
-              <a:rPr lang="en-US"/>
+              <a:rPr lang="en-US" smtClean="0"/>
               <a:t>Fourth level</a:t>
             </a:r>
           </a:p>
           <a:p>
             <a:pPr lvl="4"/>
             <a:r>
-              <a:rPr lang="en-US"/>
+              <a:rPr lang="en-US" smtClean="0"/>
               <a:t>Fifth level</a:t>
             </a:r>
+            <a:endParaRPr lang="en-US"/>
           </a:p>
         </p:txBody>
       </p:sp>
@@ -1777,7 +1718,7 @@
           <a:p>
             <a:fld id="{5BCAD085-E8A6-8845-BD4E-CB4CCA059FC4}" type="datetimeFigureOut">
               <a:rPr lang="en-US" smtClean="0"/>
-              <a:t>6/5/26</a:t>
+              <a:t>1/27/13</a:t>
             </a:fld>
             <a:endParaRPr lang="en-US"/>
           </a:p>
@@ -1880,9 +1821,10 @@
           </a:lstStyle>
           <a:p>
             <a:r>
-              <a:rPr lang="en-US"/>
+              <a:rPr lang="en-US" smtClean="0"/>
               <a:t>Click to edit Master title style</a:t>
             </a:r>
+            <a:endParaRPr lang="en-US"/>
           </a:p>
         </p:txBody>
       </p:sp>
@@ -1999,7 +1941,7 @@
           <a:p>
             <a:pPr lvl="0"/>
             <a:r>
-              <a:rPr lang="en-US"/>
+              <a:rPr lang="en-US" smtClean="0"/>
               <a:t>Click to edit Master text styles</a:t>
             </a:r>
           </a:p>
@@ -2022,7 +1964,7 @@
           <a:p>
             <a:fld id="{5BCAD085-E8A6-8845-BD4E-CB4CCA059FC4}" type="datetimeFigureOut">
               <a:rPr lang="en-US" smtClean="0"/>
-              <a:t>6/5/26</a:t>
+              <a:t>1/27/13</a:t>
             </a:fld>
             <a:endParaRPr lang="en-US"/>
           </a:p>
@@ -2116,9 +2058,10 @@
           <a:lstStyle/>
           <a:p>
             <a:r>
-              <a:rPr lang="en-US"/>
+              <a:rPr lang="en-US" smtClean="0"/>
               <a:t>Click to edit Master title style</a:t>
             </a:r>
+            <a:endParaRPr lang="en-US"/>
           </a:p>
         </p:txBody>
       </p:sp>
@@ -2172,37 +2115,38 @@
           <a:p>
             <a:pPr lvl="0"/>
             <a:r>
-              <a:rPr lang="en-US"/>
+              <a:rPr lang="en-US" smtClean="0"/>
               <a:t>Click to edit Master text styles</a:t>
             </a:r>
           </a:p>
           <a:p>
             <a:pPr lvl="1"/>
             <a:r>
-              <a:rPr lang="en-US"/>
+              <a:rPr lang="en-US" smtClean="0"/>
               <a:t>Second level</a:t>
             </a:r>
           </a:p>
           <a:p>
             <a:pPr lvl="2"/>
             <a:r>
-              <a:rPr lang="en-US"/>
+              <a:rPr lang="en-US" smtClean="0"/>
               <a:t>Third level</a:t>
             </a:r>
           </a:p>
           <a:p>
             <a:pPr lvl="3"/>
             <a:r>
-              <a:rPr lang="en-US"/>
+              <a:rPr lang="en-US" smtClean="0"/>
               <a:t>Fourth level</a:t>
             </a:r>
           </a:p>
           <a:p>
             <a:pPr lvl="4"/>
             <a:r>
-              <a:rPr lang="en-US"/>
+              <a:rPr lang="en-US" smtClean="0"/>
               <a:t>Fifth level</a:t>
             </a:r>
+            <a:endParaRPr lang="en-US"/>
           </a:p>
         </p:txBody>
       </p:sp>
@@ -2256,37 +2200,38 @@
           <a:p>
             <a:pPr lvl="0"/>
             <a:r>
-              <a:rPr lang="en-US"/>
+              <a:rPr lang="en-US" smtClean="0"/>
               <a:t>Click to edit Master text styles</a:t>
             </a:r>
           </a:p>
           <a:p>
             <a:pPr lvl="1"/>
             <a:r>
-              <a:rPr lang="en-US"/>
+              <a:rPr lang="en-US" smtClean="0"/>
               <a:t>Second level</a:t>
             </a:r>
           </a:p>
           <a:p>
             <a:pPr lvl="2"/>
             <a:r>
-              <a:rPr lang="en-US"/>
+              <a:rPr lang="en-US" smtClean="0"/>
               <a:t>Third level</a:t>
             </a:r>
           </a:p>
           <a:p>
             <a:pPr lvl="3"/>
             <a:r>
-              <a:rPr lang="en-US"/>
+              <a:rPr lang="en-US" smtClean="0"/>
               <a:t>Fourth level</a:t>
             </a:r>
           </a:p>
           <a:p>
             <a:pPr lvl="4"/>
             <a:r>
-              <a:rPr lang="en-US"/>
+              <a:rPr lang="en-US" smtClean="0"/>
               <a:t>Fifth level</a:t>
             </a:r>
+            <a:endParaRPr lang="en-US"/>
           </a:p>
         </p:txBody>
       </p:sp>
@@ -2307,7 +2252,7 @@
           <a:p>
             <a:fld id="{5BCAD085-E8A6-8845-BD4E-CB4CCA059FC4}" type="datetimeFigureOut">
               <a:rPr lang="en-US" smtClean="0"/>
-              <a:t>6/5/26</a:t>
+              <a:t>1/27/13</a:t>
             </a:fld>
             <a:endParaRPr lang="en-US"/>
           </a:p>
@@ -2405,9 +2350,10 @@
           </a:lstStyle>
           <a:p>
             <a:r>
-              <a:rPr lang="en-US"/>
+              <a:rPr lang="en-US" smtClean="0"/>
               <a:t>Click to edit Master title style</a:t>
             </a:r>
+            <a:endParaRPr lang="en-US"/>
           </a:p>
         </p:txBody>
       </p:sp>
@@ -2470,7 +2416,7 @@
           <a:p>
             <a:pPr lvl="0"/>
             <a:r>
-              <a:rPr lang="en-US"/>
+              <a:rPr lang="en-US" smtClean="0"/>
               <a:t>Click to edit Master text styles</a:t>
             </a:r>
           </a:p>
@@ -2526,37 +2472,38 @@
           <a:p>
             <a:pPr lvl="0"/>
             <a:r>
-              <a:rPr lang="en-US"/>
+              <a:rPr lang="en-US" smtClean="0"/>
               <a:t>Click to edit Master text styles</a:t>
             </a:r>
           </a:p>
           <a:p>
             <a:pPr lvl="1"/>
             <a:r>
-              <a:rPr lang="en-US"/>
+              <a:rPr lang="en-US" smtClean="0"/>
               <a:t>Second level</a:t>
             </a:r>
           </a:p>
           <a:p>
             <a:pPr lvl="2"/>
             <a:r>
-              <a:rPr lang="en-US"/>
+              <a:rPr lang="en-US" smtClean="0"/>
               <a:t>Third level</a:t>
             </a:r>
           </a:p>
           <a:p>
             <a:pPr lvl="3"/>
             <a:r>
-              <a:rPr lang="en-US"/>
+              <a:rPr lang="en-US" smtClean="0"/>
               <a:t>Fourth level</a:t>
             </a:r>
           </a:p>
           <a:p>
             <a:pPr lvl="4"/>
             <a:r>
-              <a:rPr lang="en-US"/>
+              <a:rPr lang="en-US" smtClean="0"/>
               <a:t>Fifth level</a:t>
             </a:r>
+            <a:endParaRPr lang="en-US"/>
           </a:p>
         </p:txBody>
       </p:sp>
@@ -2619,7 +2566,7 @@
           <a:p>
             <a:pPr lvl="0"/>
             <a:r>
-              <a:rPr lang="en-US"/>
+              <a:rPr lang="en-US" smtClean="0"/>
               <a:t>Click to edit Master text styles</a:t>
             </a:r>
           </a:p>
@@ -2675,37 +2622,38 @@
           <a:p>
             <a:pPr lvl="0"/>
             <a:r>
-              <a:rPr lang="en-US"/>
+              <a:rPr lang="en-US" smtClean="0"/>
               <a:t>Click to edit Master text styles</a:t>
             </a:r>
           </a:p>
           <a:p>
             <a:pPr lvl="1"/>
             <a:r>
-              <a:rPr lang="en-US"/>
+              <a:rPr lang="en-US" smtClean="0"/>
               <a:t>Second level</a:t>
             </a:r>
           </a:p>
           <a:p>
             <a:pPr lvl="2"/>
             <a:r>
-              <a:rPr lang="en-US"/>
+              <a:rPr lang="en-US" smtClean="0"/>
               <a:t>Third level</a:t>
             </a:r>
           </a:p>
           <a:p>
             <a:pPr lvl="3"/>
             <a:r>
-              <a:rPr lang="en-US"/>
+              <a:rPr lang="en-US" smtClean="0"/>
               <a:t>Fourth level</a:t>
             </a:r>
           </a:p>
           <a:p>
             <a:pPr lvl="4"/>
             <a:r>
-              <a:rPr lang="en-US"/>
+              <a:rPr lang="en-US" smtClean="0"/>
               <a:t>Fifth level</a:t>
             </a:r>
+            <a:endParaRPr lang="en-US"/>
           </a:p>
         </p:txBody>
       </p:sp>
@@ -2726,7 +2674,7 @@
           <a:p>
             <a:fld id="{5BCAD085-E8A6-8845-BD4E-CB4CCA059FC4}" type="datetimeFigureOut">
               <a:rPr lang="en-US" smtClean="0"/>
-              <a:t>6/5/26</a:t>
+              <a:t>1/27/13</a:t>
             </a:fld>
             <a:endParaRPr lang="en-US"/>
           </a:p>
@@ -2820,9 +2768,10 @@
           <a:lstStyle/>
           <a:p>
             <a:r>
-              <a:rPr lang="en-US"/>
+              <a:rPr lang="en-US" smtClean="0"/>
               <a:t>Click to edit Master title style</a:t>
             </a:r>
+            <a:endParaRPr lang="en-US"/>
           </a:p>
         </p:txBody>
       </p:sp>
@@ -2843,7 +2792,7 @@
           <a:p>
             <a:fld id="{5BCAD085-E8A6-8845-BD4E-CB4CCA059FC4}" type="datetimeFigureOut">
               <a:rPr lang="en-US" smtClean="0"/>
-              <a:t>6/5/26</a:t>
+              <a:t>1/27/13</a:t>
             </a:fld>
             <a:endParaRPr lang="en-US"/>
           </a:p>
@@ -2938,7 +2887,7 @@
           <a:p>
             <a:fld id="{5BCAD085-E8A6-8845-BD4E-CB4CCA059FC4}" type="datetimeFigureOut">
               <a:rPr lang="en-US" smtClean="0"/>
-              <a:t>6/5/26</a:t>
+              <a:t>1/27/13</a:t>
             </a:fld>
             <a:endParaRPr lang="en-US"/>
           </a:p>
@@ -3041,9 +2990,10 @@
           </a:lstStyle>
           <a:p>
             <a:r>
-              <a:rPr lang="en-US"/>
+              <a:rPr lang="en-US" smtClean="0"/>
               <a:t>Click to edit Master title style</a:t>
             </a:r>
+            <a:endParaRPr lang="en-US"/>
           </a:p>
         </p:txBody>
       </p:sp>
@@ -3097,37 +3047,38 @@
           <a:p>
             <a:pPr lvl="0"/>
             <a:r>
-              <a:rPr lang="en-US"/>
+              <a:rPr lang="en-US" smtClean="0"/>
               <a:t>Click to edit Master text styles</a:t>
             </a:r>
           </a:p>
           <a:p>
             <a:pPr lvl="1"/>
             <a:r>
-              <a:rPr lang="en-US"/>
+              <a:rPr lang="en-US" smtClean="0"/>
               <a:t>Second level</a:t>
             </a:r>
           </a:p>
           <a:p>
             <a:pPr lvl="2"/>
             <a:r>
-              <a:rPr lang="en-US"/>
+              <a:rPr lang="en-US" smtClean="0"/>
               <a:t>Third level</a:t>
             </a:r>
           </a:p>
           <a:p>
             <a:pPr lvl="3"/>
             <a:r>
-              <a:rPr lang="en-US"/>
+              <a:rPr lang="en-US" smtClean="0"/>
               <a:t>Fourth level</a:t>
             </a:r>
           </a:p>
           <a:p>
             <a:pPr lvl="4"/>
             <a:r>
-              <a:rPr lang="en-US"/>
+              <a:rPr lang="en-US" smtClean="0"/>
               <a:t>Fifth level</a:t>
             </a:r>
+            <a:endParaRPr lang="en-US"/>
           </a:p>
         </p:txBody>
       </p:sp>
@@ -3190,7 +3141,7 @@
           <a:p>
             <a:pPr lvl="0"/>
             <a:r>
-              <a:rPr lang="en-US"/>
+              <a:rPr lang="en-US" smtClean="0"/>
               <a:t>Click to edit Master text styles</a:t>
             </a:r>
           </a:p>
@@ -3213,7 +3164,7 @@
           <a:p>
             <a:fld id="{5BCAD085-E8A6-8845-BD4E-CB4CCA059FC4}" type="datetimeFigureOut">
               <a:rPr lang="en-US" smtClean="0"/>
-              <a:t>6/5/26</a:t>
+              <a:t>1/27/13</a:t>
             </a:fld>
             <a:endParaRPr lang="en-US"/>
           </a:p>
@@ -3316,9 +3267,10 @@
           </a:lstStyle>
           <a:p>
             <a:r>
-              <a:rPr lang="en-US"/>
+              <a:rPr lang="en-US" smtClean="0"/>
               <a:t>Click to edit Master title style</a:t>
             </a:r>
+            <a:endParaRPr lang="en-US"/>
           </a:p>
         </p:txBody>
       </p:sp>
@@ -3442,7 +3394,7 @@
           <a:p>
             <a:pPr lvl="0"/>
             <a:r>
-              <a:rPr lang="en-US"/>
+              <a:rPr lang="en-US" smtClean="0"/>
               <a:t>Click to edit Master text styles</a:t>
             </a:r>
           </a:p>
@@ -3465,7 +3417,7 @@
           <a:p>
             <a:fld id="{5BCAD085-E8A6-8845-BD4E-CB4CCA059FC4}" type="datetimeFigureOut">
               <a:rPr lang="en-US" smtClean="0"/>
-              <a:t>6/5/26</a:t>
+              <a:t>1/27/13</a:t>
             </a:fld>
             <a:endParaRPr lang="en-US"/>
           </a:p>
@@ -3574,9 +3526,10 @@
           <a:lstStyle/>
           <a:p>
             <a:r>
-              <a:rPr lang="en-US"/>
+              <a:rPr lang="en-US" smtClean="0"/>
               <a:t>Click to edit Master title style</a:t>
             </a:r>
+            <a:endParaRPr lang="en-US"/>
           </a:p>
         </p:txBody>
       </p:sp>
@@ -3607,37 +3560,38 @@
           <a:p>
             <a:pPr lvl="0"/>
             <a:r>
-              <a:rPr lang="en-US"/>
+              <a:rPr lang="en-US" smtClean="0"/>
               <a:t>Click to edit Master text styles</a:t>
             </a:r>
           </a:p>
           <a:p>
             <a:pPr lvl="1"/>
             <a:r>
-              <a:rPr lang="en-US"/>
+              <a:rPr lang="en-US" smtClean="0"/>
               <a:t>Second level</a:t>
             </a:r>
           </a:p>
           <a:p>
             <a:pPr lvl="2"/>
             <a:r>
-              <a:rPr lang="en-US"/>
+              <a:rPr lang="en-US" smtClean="0"/>
               <a:t>Third level</a:t>
             </a:r>
           </a:p>
           <a:p>
             <a:pPr lvl="3"/>
             <a:r>
-              <a:rPr lang="en-US"/>
+              <a:rPr lang="en-US" smtClean="0"/>
               <a:t>Fourth level</a:t>
             </a:r>
           </a:p>
           <a:p>
             <a:pPr lvl="4"/>
             <a:r>
-              <a:rPr lang="en-US"/>
+              <a:rPr lang="en-US" smtClean="0"/>
               <a:t>Fifth level</a:t>
             </a:r>
+            <a:endParaRPr lang="en-US"/>
           </a:p>
         </p:txBody>
       </p:sp>
@@ -3676,7 +3630,7 @@
           <a:p>
             <a:fld id="{5BCAD085-E8A6-8845-BD4E-CB4CCA059FC4}" type="datetimeFigureOut">
               <a:rPr lang="en-US" smtClean="0"/>
-              <a:t>6/5/26</a:t>
+              <a:t>1/27/13</a:t>
             </a:fld>
             <a:endParaRPr lang="en-US"/>
           </a:p>
@@ -4035,7 +3989,7 @@
 </file>
 
 <file path=ppt/slides/slide1.xml><?xml version="1.0" encoding="utf-8"?>
-<p:sld xmlns:a="http://schemas.openxmlformats.org/drawingml/2006/main" xmlns:r="http://schemas.openxmlformats.org/officeDocument/2006/relationships" xmlns:p="http://schemas.openxmlformats.org/presentationml/2006/main">
+<p:sld xmlns:a="http://schemas.openxmlformats.org/drawingml/2006/main" xmlns:p="http://schemas.openxmlformats.org/presentationml/2006/main" xmlns:r="http://schemas.openxmlformats.org/officeDocument/2006/relationships">
   <p:cSld>
     <p:bg>
       <p:bgPr>
@@ -4051,14 +4005,7 @@
         <p:cNvGrpSpPr/>
         <p:nvPr/>
       </p:nvGrpSpPr>
-      <p:grpSpPr>
-        <a:xfrm>
-          <a:off x="0" y="0"/>
-          <a:ext cx="0" cy="0"/>
-          <a:chOff x="0" y="0"/>
-          <a:chExt cx="0" cy="0"/>
-        </a:xfrm>
-      </p:grpSpPr>
+      <p:grpSpPr/>
       <p:sp>
         <p:nvSpPr>
           <p:cNvPr id="2" name="Rectangle 1"/>
@@ -4100,7 +4047,6 @@
           <a:lstStyle/>
           <a:p>
             <a:pPr algn="ctr"/>
-            <a:endParaRPr/>
           </a:p>
         </p:txBody>
       </p:sp>
@@ -4147,7 +4093,6 @@
           <a:lstStyle/>
           <a:p>
             <a:pPr algn="ctr"/>
-            <a:endParaRPr/>
           </a:p>
         </p:txBody>
       </p:sp>
@@ -4168,7 +4113,7 @@
           <a:noFill/>
         </p:spPr>
         <p:txBody>
-          <a:bodyPr wrap="square" lIns="25400" tIns="12700" rIns="25400" bIns="12700" anchor="ctr">
+          <a:bodyPr wrap="square" anchor="ctr" lIns="25400" rIns="25400" tIns="12700" bIns="12700">
             <a:spAutoFit/>
           </a:bodyPr>
           <a:lstStyle/>
@@ -4203,7 +4148,7 @@
           <a:noFill/>
         </p:spPr>
         <p:txBody>
-          <a:bodyPr wrap="square" lIns="25400" tIns="12700" rIns="25400" bIns="12700" anchor="t">
+          <a:bodyPr wrap="square" anchor="t" lIns="25400" rIns="25400" tIns="12700" bIns="12700">
             <a:spAutoFit/>
           </a:bodyPr>
           <a:lstStyle/>
@@ -4238,7 +4183,7 @@
           <a:noFill/>
         </p:spPr>
         <p:txBody>
-          <a:bodyPr wrap="square" lIns="25400" tIns="12700" rIns="25400" bIns="12700" anchor="t">
+          <a:bodyPr wrap="square" anchor="t" lIns="25400" rIns="25400" tIns="12700" bIns="12700">
             <a:spAutoFit/>
           </a:bodyPr>
           <a:lstStyle/>
@@ -4273,7 +4218,7 @@
           <a:noFill/>
         </p:spPr>
         <p:txBody>
-          <a:bodyPr wrap="square" lIns="25400" tIns="12700" rIns="25400" bIns="12700" anchor="t">
+          <a:bodyPr wrap="square" anchor="t" lIns="25400" rIns="25400" tIns="12700" bIns="12700">
             <a:spAutoFit/>
           </a:bodyPr>
           <a:lstStyle/>
@@ -4332,7 +4277,6 @@
           <a:lstStyle/>
           <a:p>
             <a:pPr algn="ctr"/>
-            <a:endParaRPr/>
           </a:p>
         </p:txBody>
       </p:sp>
@@ -4353,29 +4297,20 @@
           <a:noFill/>
         </p:spPr>
         <p:txBody>
-          <a:bodyPr wrap="square" lIns="25400" tIns="12700" rIns="25400" bIns="12700" anchor="t">
+          <a:bodyPr wrap="square" anchor="t" lIns="25400" rIns="25400" tIns="12700" bIns="12700">
             <a:spAutoFit/>
           </a:bodyPr>
           <a:lstStyle/>
           <a:p>
             <a:pPr algn="l"/>
             <a:r>
-              <a:rPr sz="1300" b="0" dirty="0" err="1">
+              <a:rPr sz="1300" b="0">
                 <a:solidFill>
                   <a:srgbClr val="33312B"/>
                 </a:solidFill>
                 <a:latin typeface="Apple SD Gothic Neo"/>
               </a:rPr>
-              <a:t>이설</a:t>
-            </a:r>
-            <a:r>
-              <a:rPr sz="1300" b="0" dirty="0">
-                <a:solidFill>
-                  <a:srgbClr val="33312B"/>
-                </a:solidFill>
-                <a:latin typeface="Apple SD Gothic Neo"/>
-              </a:rPr>
-              <a:t>      |      2026-06-05</a:t>
+              <a:t>이설      |      2026-10-05</a:t>
             </a:r>
           </a:p>
         </p:txBody>
@@ -4425,7 +4360,6 @@
           <a:lstStyle/>
           <a:p>
             <a:pPr algn="ctr"/>
-            <a:endParaRPr/>
           </a:p>
         </p:txBody>
       </p:sp>
@@ -4474,7 +4408,6 @@
           <a:lstStyle/>
           <a:p>
             <a:pPr algn="ctr"/>
-            <a:endParaRPr/>
           </a:p>
         </p:txBody>
       </p:sp>
@@ -4523,7 +4456,6 @@
           <a:lstStyle/>
           <a:p>
             <a:pPr algn="ctr"/>
-            <a:endParaRPr/>
           </a:p>
         </p:txBody>
       </p:sp>
@@ -4544,7 +4476,7 @@
           <a:noFill/>
         </p:spPr>
         <p:txBody>
-          <a:bodyPr wrap="square" lIns="25400" tIns="12700" rIns="25400" bIns="12700" anchor="t">
+          <a:bodyPr wrap="square" anchor="t" lIns="25400" rIns="25400" tIns="12700" bIns="12700">
             <a:spAutoFit/>
           </a:bodyPr>
           <a:lstStyle/>
@@ -4579,7 +4511,7 @@
           <a:noFill/>
         </p:spPr>
         <p:txBody>
-          <a:bodyPr wrap="square" lIns="25400" tIns="12700" rIns="25400" bIns="12700" anchor="t">
+          <a:bodyPr wrap="square" anchor="t" lIns="25400" rIns="25400" tIns="12700" bIns="12700">
             <a:spAutoFit/>
           </a:bodyPr>
           <a:lstStyle/>
@@ -4614,7 +4546,7 @@
           <a:noFill/>
         </p:spPr>
         <p:txBody>
-          <a:bodyPr wrap="square" lIns="25400" tIns="12700" rIns="25400" bIns="12700" anchor="t">
+          <a:bodyPr wrap="square" anchor="t" lIns="25400" rIns="25400" tIns="12700" bIns="12700">
             <a:spAutoFit/>
           </a:bodyPr>
           <a:lstStyle/>
@@ -4641,7 +4573,7 @@
 </file>
 
 <file path=ppt/slides/slide10.xml><?xml version="1.0" encoding="utf-8"?>
-<p:sld xmlns:a="http://schemas.openxmlformats.org/drawingml/2006/main" xmlns:r="http://schemas.openxmlformats.org/officeDocument/2006/relationships" xmlns:p="http://schemas.openxmlformats.org/presentationml/2006/main">
+<p:sld xmlns:a="http://schemas.openxmlformats.org/drawingml/2006/main" xmlns:p="http://schemas.openxmlformats.org/presentationml/2006/main" xmlns:r="http://schemas.openxmlformats.org/officeDocument/2006/relationships">
   <p:cSld>
     <p:bg>
       <p:bgPr>
@@ -4657,14 +4589,7 @@
         <p:cNvGrpSpPr/>
         <p:nvPr/>
       </p:nvGrpSpPr>
-      <p:grpSpPr>
-        <a:xfrm>
-          <a:off x="0" y="0"/>
-          <a:ext cx="0" cy="0"/>
-          <a:chOff x="0" y="0"/>
-          <a:chExt cx="0" cy="0"/>
-        </a:xfrm>
-      </p:grpSpPr>
+      <p:grpSpPr/>
       <p:sp>
         <p:nvSpPr>
           <p:cNvPr id="2" name="Rectangle 1"/>
@@ -4706,7 +4631,6 @@
           <a:lstStyle/>
           <a:p>
             <a:pPr algn="ctr"/>
-            <a:endParaRPr/>
           </a:p>
         </p:txBody>
       </p:sp>
@@ -4727,7 +4651,7 @@
           <a:noFill/>
         </p:spPr>
         <p:txBody>
-          <a:bodyPr wrap="square" lIns="25400" tIns="12700" rIns="25400" bIns="12700" anchor="ctr">
+          <a:bodyPr wrap="square" anchor="ctr" lIns="25400" rIns="25400" tIns="12700" bIns="12700">
             <a:spAutoFit/>
           </a:bodyPr>
           <a:lstStyle/>
@@ -4762,7 +4686,7 @@
           <a:noFill/>
         </p:spPr>
         <p:txBody>
-          <a:bodyPr wrap="square" lIns="25400" tIns="12700" rIns="25400" bIns="12700" anchor="ctr">
+          <a:bodyPr wrap="square" anchor="ctr" lIns="25400" rIns="25400" tIns="12700" bIns="12700">
             <a:spAutoFit/>
           </a:bodyPr>
           <a:lstStyle/>
@@ -4821,7 +4745,6 @@
           <a:lstStyle/>
           <a:p>
             <a:pPr algn="ctr"/>
-            <a:endParaRPr/>
           </a:p>
         </p:txBody>
       </p:sp>
@@ -4834,7 +4757,7 @@
 </file>
 
 <file path=ppt/slides/slide11.xml><?xml version="1.0" encoding="utf-8"?>
-<p:sld xmlns:a="http://schemas.openxmlformats.org/drawingml/2006/main" xmlns:r="http://schemas.openxmlformats.org/officeDocument/2006/relationships" xmlns:p="http://schemas.openxmlformats.org/presentationml/2006/main">
+<p:sld xmlns:a="http://schemas.openxmlformats.org/drawingml/2006/main" xmlns:p="http://schemas.openxmlformats.org/presentationml/2006/main" xmlns:r="http://schemas.openxmlformats.org/officeDocument/2006/relationships">
   <p:cSld>
     <p:bg>
       <p:bgPr>
@@ -4850,14 +4773,7 @@
         <p:cNvGrpSpPr/>
         <p:nvPr/>
       </p:nvGrpSpPr>
-      <p:grpSpPr>
-        <a:xfrm>
-          <a:off x="0" y="0"/>
-          <a:ext cx="0" cy="0"/>
-          <a:chOff x="0" y="0"/>
-          <a:chExt cx="0" cy="0"/>
-        </a:xfrm>
-      </p:grpSpPr>
+      <p:grpSpPr/>
       <p:sp>
         <p:nvSpPr>
           <p:cNvPr id="2" name="Rectangle 1"/>
@@ -4899,7 +4815,6 @@
           <a:lstStyle/>
           <a:p>
             <a:pPr algn="ctr"/>
-            <a:endParaRPr/>
           </a:p>
         </p:txBody>
       </p:sp>
@@ -4920,7 +4835,7 @@
           <a:noFill/>
         </p:spPr>
         <p:txBody>
-          <a:bodyPr wrap="square" lIns="25400" tIns="12700" rIns="25400" bIns="12700" anchor="t">
+          <a:bodyPr wrap="square" anchor="t" lIns="25400" rIns="25400" tIns="12700" bIns="12700">
             <a:spAutoFit/>
           </a:bodyPr>
           <a:lstStyle/>
@@ -4955,7 +4870,7 @@
           <a:noFill/>
         </p:spPr>
         <p:txBody>
-          <a:bodyPr wrap="square" lIns="25400" tIns="12700" rIns="25400" bIns="12700" anchor="t">
+          <a:bodyPr wrap="square" anchor="t" lIns="25400" rIns="25400" tIns="12700" bIns="12700">
             <a:spAutoFit/>
           </a:bodyPr>
           <a:lstStyle/>
@@ -5018,7 +4933,6 @@
           <a:lstStyle/>
           <a:p>
             <a:pPr algn="ctr"/>
-            <a:endParaRPr/>
           </a:p>
         </p:txBody>
       </p:sp>
@@ -5063,7 +4977,6 @@
           <a:lstStyle/>
           <a:p>
             <a:pPr algn="ctr"/>
-            <a:endParaRPr/>
           </a:p>
         </p:txBody>
       </p:sp>
@@ -5110,7 +5023,7 @@
                 </a:solidFill>
                 <a:latin typeface="Apple SD Gothic Neo"/>
               </a:rPr>
-              <a:t>모니터링·컨테이너 오케스트레이션·CI/CD·높은 테스트 커버리지로 '운영 가능한' 수준까지 완성</a:t>
+              <a:t>Outbox backlog·발행 실패 지표, release gate, 백업·복구 리허설을 운영 증적으로 관리</a:t>
             </a:r>
           </a:p>
         </p:txBody>
@@ -5164,7 +5077,7 @@
                 </a:solidFill>
                 <a:latin typeface="Apple SD Gothic Neo"/>
               </a:rPr>
-              <a:t>관측성: Prometheus + Grafana(발송량·5xx·Lag) + Zipkin 분산 트레이싱</a:t>
+              <a:t>관측성: Prometheus/Grafana로 두 Outbox backlog·발행 실패, 5xx, Lag 추적</a:t>
             </a:r>
           </a:p>
           <a:p>
@@ -5195,7 +5108,7 @@
                 </a:solidFill>
                 <a:latin typeface="Apple SD Gothic Neo"/>
               </a:rPr>
-              <a:t>배포: Docker Compose(로컬) · Kubernetes(HPA 2~10 Pod) · Terraform IaC</a:t>
+              <a:t>출시 게이트: 정적 CI 검사와 live rollout·TLS·NetworkPolicy 검증 경로 분리</a:t>
             </a:r>
           </a:p>
           <a:p>
@@ -5226,7 +5139,7 @@
                 </a:solidFill>
                 <a:latin typeface="Apple SD Gothic Neo"/>
               </a:rPr>
-              <a:t>CI/CD: GitHub Actions 전체 테스트 + 7개 서비스 Docker 이미지 매트릭스 빌드</a:t>
+              <a:t>복구: 격리 Compose backup 6초, clean restore 17초로 RPO/RTO 측정</a:t>
             </a:r>
           </a:p>
           <a:p>
@@ -5257,7 +5170,7 @@
                 </a:solidFill>
                 <a:latin typeface="Apple SD Gothic Neo"/>
               </a:rPr>
-              <a:t>테스트: 도메인+애플리케이션 계층 커버리지 83.5% ~ 94.7%</a:t>
+              <a:t>테스트: Maven 10모듈과 Testcontainers E2E로 메시지 흐름 검증</a:t>
             </a:r>
           </a:p>
         </p:txBody>
@@ -5279,7 +5192,7 @@
           <a:noFill/>
         </p:spPr>
         <p:txBody>
-          <a:bodyPr wrap="square" lIns="25400" tIns="12700" rIns="25400" bIns="12700" anchor="t">
+          <a:bodyPr wrap="square" anchor="t" lIns="25400" rIns="25400" tIns="12700" bIns="12700">
             <a:spAutoFit/>
           </a:bodyPr>
           <a:lstStyle/>
@@ -5311,7 +5224,7 @@
         </p:xfrm>
         <a:graphic>
           <a:graphicData uri="http://schemas.openxmlformats.org/drawingml/2006/chart">
-            <c:chart xmlns:c="http://schemas.openxmlformats.org/drawingml/2006/chart" xmlns:r="http://schemas.openxmlformats.org/officeDocument/2006/relationships" r:id="rId3"/>
+            <c:chart xmlns:c="http://schemas.openxmlformats.org/drawingml/2006/chart" r:id="rId2"/>
           </a:graphicData>
         </a:graphic>
       </p:graphicFrame>
@@ -5332,7 +5245,7 @@
           <a:noFill/>
         </p:spPr>
         <p:txBody>
-          <a:bodyPr wrap="square" lIns="25400" tIns="12700" rIns="25400" bIns="12700" anchor="t">
+          <a:bodyPr wrap="square" anchor="t" lIns="25400" rIns="25400" tIns="12700" bIns="12700">
             <a:spAutoFit/>
           </a:bodyPr>
           <a:lstStyle/>
@@ -5359,7 +5272,7 @@
 </file>
 
 <file path=ppt/slides/slide12.xml><?xml version="1.0" encoding="utf-8"?>
-<p:sld xmlns:a="http://schemas.openxmlformats.org/drawingml/2006/main" xmlns:r="http://schemas.openxmlformats.org/officeDocument/2006/relationships" xmlns:p="http://schemas.openxmlformats.org/presentationml/2006/main">
+<p:sld xmlns:a="http://schemas.openxmlformats.org/drawingml/2006/main" xmlns:p="http://schemas.openxmlformats.org/presentationml/2006/main" xmlns:r="http://schemas.openxmlformats.org/officeDocument/2006/relationships">
   <p:cSld>
     <p:bg>
       <p:bgPr>
@@ -5375,14 +5288,7 @@
         <p:cNvGrpSpPr/>
         <p:nvPr/>
       </p:nvGrpSpPr>
-      <p:grpSpPr>
-        <a:xfrm>
-          <a:off x="0" y="0"/>
-          <a:ext cx="0" cy="0"/>
-          <a:chOff x="0" y="0"/>
-          <a:chExt cx="0" cy="0"/>
-        </a:xfrm>
-      </p:grpSpPr>
+      <p:grpSpPr/>
       <p:sp>
         <p:nvSpPr>
           <p:cNvPr id="2" name="Rectangle 1"/>
@@ -5424,7 +5330,6 @@
           <a:lstStyle/>
           <a:p>
             <a:pPr algn="ctr"/>
-            <a:endParaRPr/>
           </a:p>
         </p:txBody>
       </p:sp>
@@ -5445,7 +5350,7 @@
           <a:noFill/>
         </p:spPr>
         <p:txBody>
-          <a:bodyPr wrap="square" lIns="25400" tIns="12700" rIns="25400" bIns="12700" anchor="t">
+          <a:bodyPr wrap="square" anchor="t" lIns="25400" rIns="25400" tIns="12700" bIns="12700">
             <a:spAutoFit/>
           </a:bodyPr>
           <a:lstStyle/>
@@ -5480,7 +5385,7 @@
           <a:noFill/>
         </p:spPr>
         <p:txBody>
-          <a:bodyPr wrap="square" lIns="25400" tIns="12700" rIns="25400" bIns="12700" anchor="t">
+          <a:bodyPr wrap="square" anchor="t" lIns="25400" rIns="25400" tIns="12700" bIns="12700">
             <a:spAutoFit/>
           </a:bodyPr>
           <a:lstStyle/>
@@ -5539,7 +5444,6 @@
           <a:lstStyle/>
           <a:p>
             <a:pPr algn="ctr"/>
-            <a:endParaRPr/>
           </a:p>
         </p:txBody>
       </p:sp>
@@ -5560,7 +5464,7 @@
           <a:noFill/>
         </p:spPr>
         <p:txBody>
-          <a:bodyPr wrap="square" lIns="25400" tIns="12700" rIns="25400" bIns="12700" anchor="ctr">
+          <a:bodyPr wrap="square" anchor="ctr" lIns="25400" rIns="25400" tIns="12700" bIns="12700">
             <a:spAutoFit/>
           </a:bodyPr>
           <a:lstStyle/>
@@ -5595,7 +5499,7 @@
           <a:noFill/>
         </p:spPr>
         <p:txBody>
-          <a:bodyPr wrap="square" lIns="25400" tIns="12700" rIns="25400" bIns="12700" anchor="ctr">
+          <a:bodyPr wrap="square" anchor="ctr" lIns="25400" rIns="25400" tIns="12700" bIns="12700">
             <a:spAutoFit/>
           </a:bodyPr>
           <a:lstStyle/>
@@ -5630,7 +5534,7 @@
           <a:noFill/>
         </p:spPr>
         <p:txBody>
-          <a:bodyPr wrap="square" lIns="25400" tIns="12700" rIns="25400" bIns="12700" anchor="ctr">
+          <a:bodyPr wrap="square" anchor="ctr" lIns="25400" rIns="25400" tIns="12700" bIns="12700">
             <a:spAutoFit/>
           </a:bodyPr>
           <a:lstStyle/>
@@ -5689,7 +5593,6 @@
           <a:lstStyle/>
           <a:p>
             <a:pPr algn="ctr"/>
-            <a:endParaRPr/>
           </a:p>
         </p:txBody>
       </p:sp>
@@ -5710,7 +5613,7 @@
           <a:noFill/>
         </p:spPr>
         <p:txBody>
-          <a:bodyPr wrap="square" lIns="25400" tIns="12700" rIns="25400" bIns="12700" anchor="ctr">
+          <a:bodyPr wrap="square" anchor="ctr" lIns="25400" rIns="25400" tIns="12700" bIns="12700">
             <a:spAutoFit/>
           </a:bodyPr>
           <a:lstStyle/>
@@ -5745,7 +5648,7 @@
           <a:noFill/>
         </p:spPr>
         <p:txBody>
-          <a:bodyPr wrap="square" lIns="25400" tIns="12700" rIns="25400" bIns="12700" anchor="ctr">
+          <a:bodyPr wrap="square" anchor="ctr" lIns="25400" rIns="25400" tIns="12700" bIns="12700">
             <a:spAutoFit/>
           </a:bodyPr>
           <a:lstStyle/>
@@ -5780,7 +5683,7 @@
           <a:noFill/>
         </p:spPr>
         <p:txBody>
-          <a:bodyPr wrap="square" lIns="25400" tIns="12700" rIns="25400" bIns="12700" anchor="ctr">
+          <a:bodyPr wrap="square" anchor="ctr" lIns="25400" rIns="25400" tIns="12700" bIns="12700">
             <a:spAutoFit/>
           </a:bodyPr>
           <a:lstStyle/>
@@ -5793,7 +5696,7 @@
                 </a:solidFill>
                 <a:latin typeface="Apple SD Gothic Neo"/>
               </a:rPr>
-              <a:t>분산 환경의 멱등성/재시도/DLQ, Circuit Breaker, 원자적 집계로 신뢰성 확보</a:t>
+              <a:t>notification·delivery result Outbox, 멱등성, 재시도/DLQ로 at-least-once 흐름 관리</a:t>
             </a:r>
           </a:p>
         </p:txBody>
@@ -5839,7 +5742,6 @@
           <a:lstStyle/>
           <a:p>
             <a:pPr algn="ctr"/>
-            <a:endParaRPr/>
           </a:p>
         </p:txBody>
       </p:sp>
@@ -5860,7 +5762,7 @@
           <a:noFill/>
         </p:spPr>
         <p:txBody>
-          <a:bodyPr wrap="square" lIns="25400" tIns="12700" rIns="25400" bIns="12700" anchor="ctr">
+          <a:bodyPr wrap="square" anchor="ctr" lIns="25400" rIns="25400" tIns="12700" bIns="12700">
             <a:spAutoFit/>
           </a:bodyPr>
           <a:lstStyle/>
@@ -5895,7 +5797,7 @@
           <a:noFill/>
         </p:spPr>
         <p:txBody>
-          <a:bodyPr wrap="square" lIns="25400" tIns="12700" rIns="25400" bIns="12700" anchor="ctr">
+          <a:bodyPr wrap="square" anchor="ctr" lIns="25400" rIns="25400" tIns="12700" bIns="12700">
             <a:spAutoFit/>
           </a:bodyPr>
           <a:lstStyle/>
@@ -5930,7 +5832,7 @@
           <a:noFill/>
         </p:spPr>
         <p:txBody>
-          <a:bodyPr wrap="square" lIns="25400" tIns="12700" rIns="25400" bIns="12700" anchor="ctr">
+          <a:bodyPr wrap="square" anchor="ctr" lIns="25400" rIns="25400" tIns="12700" bIns="12700">
             <a:spAutoFit/>
           </a:bodyPr>
           <a:lstStyle/>
@@ -5943,7 +5845,7 @@
                 </a:solidFill>
                 <a:latin typeface="Apple SD Gothic Neo"/>
               </a:rPr>
-              <a:t>관측성(Prometheus/Zipkin)과 오케스트레이션(K8s/HPA)으로 운영 관점까지 경험</a:t>
+              <a:t>Outbox 지표, release gate, 6초 backup과 17초 clean restore로 운영 증적 축적</a:t>
             </a:r>
           </a:p>
         </p:txBody>
@@ -5989,7 +5891,6 @@
           <a:lstStyle/>
           <a:p>
             <a:pPr algn="ctr"/>
-            <a:endParaRPr/>
           </a:p>
         </p:txBody>
       </p:sp>
@@ -6010,7 +5911,7 @@
           <a:noFill/>
         </p:spPr>
         <p:txBody>
-          <a:bodyPr wrap="square" lIns="25400" tIns="12700" rIns="25400" bIns="12700" anchor="ctr">
+          <a:bodyPr wrap="square" anchor="ctr" lIns="25400" rIns="25400" tIns="12700" bIns="12700">
             <a:spAutoFit/>
           </a:bodyPr>
           <a:lstStyle/>
@@ -6045,7 +5946,7 @@
           <a:noFill/>
         </p:spPr>
         <p:txBody>
-          <a:bodyPr wrap="square" lIns="25400" tIns="12700" rIns="25400" bIns="12700" anchor="ctr">
+          <a:bodyPr wrap="square" anchor="ctr" lIns="25400" rIns="25400" tIns="12700" bIns="12700">
             <a:spAutoFit/>
           </a:bodyPr>
           <a:lstStyle/>
@@ -6058,7 +5959,7 @@
                 </a:solidFill>
                 <a:latin typeface="Apple SD Gothic Neo"/>
               </a:rPr>
-              <a:t>개선 방향</a:t>
+              <a:t>다음 단계</a:t>
             </a:r>
           </a:p>
         </p:txBody>
@@ -6080,7 +5981,7 @@
           <a:noFill/>
         </p:spPr>
         <p:txBody>
-          <a:bodyPr wrap="square" lIns="25400" tIns="12700" rIns="25400" bIns="12700" anchor="ctr">
+          <a:bodyPr wrap="square" anchor="ctr" lIns="25400" rIns="25400" tIns="12700" bIns="12700">
             <a:spAutoFit/>
           </a:bodyPr>
           <a:lstStyle/>
@@ -6093,7 +5994,7 @@
                 </a:solidFill>
                 <a:latin typeface="Apple SD Gothic Neo"/>
               </a:rPr>
-              <a:t>실제 채널(SendGrid/Twilio/FCM) 연동, Outbox 패턴 도입, E2E 자동화 확대</a:t>
+              <a:t>Twilio 실제 발송, iOS FCM/APNs, production release smoke와 rollback 증적</a:t>
             </a:r>
           </a:p>
         </p:txBody>
@@ -6143,7 +6044,6 @@
           <a:lstStyle/>
           <a:p>
             <a:pPr algn="ctr"/>
-            <a:endParaRPr/>
           </a:p>
         </p:txBody>
       </p:sp>
@@ -6164,7 +6064,7 @@
           <a:noFill/>
         </p:spPr>
         <p:txBody>
-          <a:bodyPr wrap="square" lIns="25400" tIns="12700" rIns="25400" bIns="12700" anchor="ctr">
+          <a:bodyPr wrap="square" anchor="ctr" lIns="25400" rIns="25400" tIns="12700" bIns="12700">
             <a:spAutoFit/>
           </a:bodyPr>
           <a:lstStyle/>
@@ -6191,7 +6091,7 @@
 </file>
 
 <file path=ppt/slides/slide13.xml><?xml version="1.0" encoding="utf-8"?>
-<p:sld xmlns:a="http://schemas.openxmlformats.org/drawingml/2006/main" xmlns:r="http://schemas.openxmlformats.org/officeDocument/2006/relationships" xmlns:p="http://schemas.openxmlformats.org/presentationml/2006/main">
+<p:sld xmlns:a="http://schemas.openxmlformats.org/drawingml/2006/main" xmlns:p="http://schemas.openxmlformats.org/presentationml/2006/main" xmlns:r="http://schemas.openxmlformats.org/officeDocument/2006/relationships">
   <p:cSld>
     <p:bg>
       <p:bgPr>
@@ -6207,14 +6107,7 @@
         <p:cNvGrpSpPr/>
         <p:nvPr/>
       </p:nvGrpSpPr>
-      <p:grpSpPr>
-        <a:xfrm>
-          <a:off x="0" y="0"/>
-          <a:ext cx="0" cy="0"/>
-          <a:chOff x="0" y="0"/>
-          <a:chExt cx="0" cy="0"/>
-        </a:xfrm>
-      </p:grpSpPr>
+      <p:grpSpPr/>
       <p:sp>
         <p:nvSpPr>
           <p:cNvPr id="2" name="Rectangle 1"/>
@@ -6256,7 +6149,6 @@
           <a:lstStyle/>
           <a:p>
             <a:pPr algn="ctr"/>
-            <a:endParaRPr/>
           </a:p>
         </p:txBody>
       </p:sp>
@@ -6303,7 +6195,6 @@
           <a:lstStyle/>
           <a:p>
             <a:pPr algn="ctr"/>
-            <a:endParaRPr/>
           </a:p>
         </p:txBody>
       </p:sp>
@@ -6324,7 +6215,7 @@
           <a:noFill/>
         </p:spPr>
         <p:txBody>
-          <a:bodyPr wrap="square" lIns="25400" tIns="12700" rIns="25400" bIns="12700" anchor="ctr">
+          <a:bodyPr wrap="square" anchor="ctr" lIns="25400" rIns="25400" tIns="12700" bIns="12700">
             <a:spAutoFit/>
           </a:bodyPr>
           <a:lstStyle/>
@@ -6359,7 +6250,7 @@
           <a:noFill/>
         </p:spPr>
         <p:txBody>
-          <a:bodyPr wrap="square" lIns="25400" tIns="12700" rIns="25400" bIns="12700" anchor="t">
+          <a:bodyPr wrap="square" anchor="t" lIns="25400" rIns="25400" tIns="12700" bIns="12700">
             <a:spAutoFit/>
           </a:bodyPr>
           <a:lstStyle/>
@@ -6394,7 +6285,7 @@
           <a:noFill/>
         </p:spPr>
         <p:txBody>
-          <a:bodyPr wrap="square" lIns="25400" tIns="12700" rIns="25400" bIns="12700" anchor="t">
+          <a:bodyPr wrap="square" anchor="t" lIns="25400" rIns="25400" tIns="12700" bIns="12700">
             <a:spAutoFit/>
           </a:bodyPr>
           <a:lstStyle/>
@@ -6429,7 +6320,7 @@
           <a:noFill/>
         </p:spPr>
         <p:txBody>
-          <a:bodyPr wrap="square" lIns="25400" tIns="12700" rIns="25400" bIns="12700" anchor="t">
+          <a:bodyPr wrap="square" anchor="t" lIns="25400" rIns="25400" tIns="12700" bIns="12700">
             <a:spAutoFit/>
           </a:bodyPr>
           <a:lstStyle/>
@@ -6456,7 +6347,7 @@
 </file>
 
 <file path=ppt/slides/slide2.xml><?xml version="1.0" encoding="utf-8"?>
-<p:sld xmlns:a="http://schemas.openxmlformats.org/drawingml/2006/main" xmlns:r="http://schemas.openxmlformats.org/officeDocument/2006/relationships" xmlns:p="http://schemas.openxmlformats.org/presentationml/2006/main">
+<p:sld xmlns:a="http://schemas.openxmlformats.org/drawingml/2006/main" xmlns:p="http://schemas.openxmlformats.org/presentationml/2006/main" xmlns:r="http://schemas.openxmlformats.org/officeDocument/2006/relationships">
   <p:cSld>
     <p:bg>
       <p:bgPr>
@@ -6472,14 +6363,7 @@
         <p:cNvGrpSpPr/>
         <p:nvPr/>
       </p:nvGrpSpPr>
-      <p:grpSpPr>
-        <a:xfrm>
-          <a:off x="0" y="0"/>
-          <a:ext cx="0" cy="0"/>
-          <a:chOff x="0" y="0"/>
-          <a:chExt cx="0" cy="0"/>
-        </a:xfrm>
-      </p:grpSpPr>
+      <p:grpSpPr/>
       <p:sp>
         <p:nvSpPr>
           <p:cNvPr id="2" name="Rectangle 1"/>
@@ -6521,7 +6405,6 @@
           <a:lstStyle/>
           <a:p>
             <a:pPr algn="ctr"/>
-            <a:endParaRPr/>
           </a:p>
         </p:txBody>
       </p:sp>
@@ -6542,7 +6425,7 @@
           <a:noFill/>
         </p:spPr>
         <p:txBody>
-          <a:bodyPr wrap="square" lIns="25400" tIns="12700" rIns="25400" bIns="12700" anchor="t">
+          <a:bodyPr wrap="square" anchor="t" lIns="25400" rIns="25400" tIns="12700" bIns="12700">
             <a:spAutoFit/>
           </a:bodyPr>
           <a:lstStyle/>
@@ -6577,7 +6460,7 @@
           <a:noFill/>
         </p:spPr>
         <p:txBody>
-          <a:bodyPr wrap="square" lIns="25400" tIns="12700" rIns="25400" bIns="12700" anchor="t">
+          <a:bodyPr wrap="square" anchor="t" lIns="25400" rIns="25400" tIns="12700" bIns="12700">
             <a:spAutoFit/>
           </a:bodyPr>
           <a:lstStyle/>
@@ -6638,7 +6521,6 @@
           <a:lstStyle/>
           <a:p>
             <a:pPr algn="ctr"/>
-            <a:endParaRPr/>
           </a:p>
         </p:txBody>
       </p:sp>
@@ -6659,7 +6541,7 @@
           <a:noFill/>
         </p:spPr>
         <p:txBody>
-          <a:bodyPr wrap="square" lIns="25400" tIns="12700" rIns="25400" bIns="12700" anchor="ctr">
+          <a:bodyPr wrap="square" anchor="ctr" lIns="25400" rIns="25400" tIns="12700" bIns="12700">
             <a:spAutoFit/>
           </a:bodyPr>
           <a:lstStyle/>
@@ -6694,7 +6576,7 @@
           <a:noFill/>
         </p:spPr>
         <p:txBody>
-          <a:bodyPr wrap="square" lIns="25400" tIns="12700" rIns="25400" bIns="12700" anchor="ctr">
+          <a:bodyPr wrap="square" anchor="ctr" lIns="25400" rIns="25400" tIns="12700" bIns="12700">
             <a:spAutoFit/>
           </a:bodyPr>
           <a:lstStyle/>
@@ -6755,7 +6637,6 @@
           <a:lstStyle/>
           <a:p>
             <a:pPr algn="ctr"/>
-            <a:endParaRPr/>
           </a:p>
         </p:txBody>
       </p:sp>
@@ -6776,7 +6657,7 @@
           <a:noFill/>
         </p:spPr>
         <p:txBody>
-          <a:bodyPr wrap="square" lIns="25400" tIns="12700" rIns="25400" bIns="12700" anchor="ctr">
+          <a:bodyPr wrap="square" anchor="ctr" lIns="25400" rIns="25400" tIns="12700" bIns="12700">
             <a:spAutoFit/>
           </a:bodyPr>
           <a:lstStyle/>
@@ -6811,7 +6692,7 @@
           <a:noFill/>
         </p:spPr>
         <p:txBody>
-          <a:bodyPr wrap="square" lIns="25400" tIns="12700" rIns="25400" bIns="12700" anchor="ctr">
+          <a:bodyPr wrap="square" anchor="ctr" lIns="25400" rIns="25400" tIns="12700" bIns="12700">
             <a:spAutoFit/>
           </a:bodyPr>
           <a:lstStyle/>
@@ -6872,7 +6753,6 @@
           <a:lstStyle/>
           <a:p>
             <a:pPr algn="ctr"/>
-            <a:endParaRPr/>
           </a:p>
         </p:txBody>
       </p:sp>
@@ -6893,7 +6773,7 @@
           <a:noFill/>
         </p:spPr>
         <p:txBody>
-          <a:bodyPr wrap="square" lIns="25400" tIns="12700" rIns="25400" bIns="12700" anchor="ctr">
+          <a:bodyPr wrap="square" anchor="ctr" lIns="25400" rIns="25400" tIns="12700" bIns="12700">
             <a:spAutoFit/>
           </a:bodyPr>
           <a:lstStyle/>
@@ -6928,7 +6808,7 @@
           <a:noFill/>
         </p:spPr>
         <p:txBody>
-          <a:bodyPr wrap="square" lIns="25400" tIns="12700" rIns="25400" bIns="12700" anchor="ctr">
+          <a:bodyPr wrap="square" anchor="ctr" lIns="25400" rIns="25400" tIns="12700" bIns="12700">
             <a:spAutoFit/>
           </a:bodyPr>
           <a:lstStyle/>
@@ -6989,7 +6869,6 @@
           <a:lstStyle/>
           <a:p>
             <a:pPr algn="ctr"/>
-            <a:endParaRPr/>
           </a:p>
         </p:txBody>
       </p:sp>
@@ -7010,7 +6889,7 @@
           <a:noFill/>
         </p:spPr>
         <p:txBody>
-          <a:bodyPr wrap="square" lIns="25400" tIns="12700" rIns="25400" bIns="12700" anchor="ctr">
+          <a:bodyPr wrap="square" anchor="ctr" lIns="25400" rIns="25400" tIns="12700" bIns="12700">
             <a:spAutoFit/>
           </a:bodyPr>
           <a:lstStyle/>
@@ -7045,7 +6924,7 @@
           <a:noFill/>
         </p:spPr>
         <p:txBody>
-          <a:bodyPr wrap="square" lIns="25400" tIns="12700" rIns="25400" bIns="12700" anchor="ctr">
+          <a:bodyPr wrap="square" anchor="ctr" lIns="25400" rIns="25400" tIns="12700" bIns="12700">
             <a:spAutoFit/>
           </a:bodyPr>
           <a:lstStyle/>
@@ -7106,7 +6985,6 @@
           <a:lstStyle/>
           <a:p>
             <a:pPr algn="ctr"/>
-            <a:endParaRPr/>
           </a:p>
         </p:txBody>
       </p:sp>
@@ -7127,7 +7005,7 @@
           <a:noFill/>
         </p:spPr>
         <p:txBody>
-          <a:bodyPr wrap="square" lIns="25400" tIns="12700" rIns="25400" bIns="12700" anchor="ctr">
+          <a:bodyPr wrap="square" anchor="ctr" lIns="25400" rIns="25400" tIns="12700" bIns="12700">
             <a:spAutoFit/>
           </a:bodyPr>
           <a:lstStyle/>
@@ -7162,7 +7040,7 @@
           <a:noFill/>
         </p:spPr>
         <p:txBody>
-          <a:bodyPr wrap="square" lIns="25400" tIns="12700" rIns="25400" bIns="12700" anchor="ctr">
+          <a:bodyPr wrap="square" anchor="ctr" lIns="25400" rIns="25400" tIns="12700" bIns="12700">
             <a:spAutoFit/>
           </a:bodyPr>
           <a:lstStyle/>
@@ -7223,7 +7101,6 @@
           <a:lstStyle/>
           <a:p>
             <a:pPr algn="ctr"/>
-            <a:endParaRPr/>
           </a:p>
         </p:txBody>
       </p:sp>
@@ -7244,7 +7121,7 @@
           <a:noFill/>
         </p:spPr>
         <p:txBody>
-          <a:bodyPr wrap="square" lIns="25400" tIns="12700" rIns="25400" bIns="12700" anchor="ctr">
+          <a:bodyPr wrap="square" anchor="ctr" lIns="25400" rIns="25400" tIns="12700" bIns="12700">
             <a:spAutoFit/>
           </a:bodyPr>
           <a:lstStyle/>
@@ -7279,7 +7156,7 @@
           <a:noFill/>
         </p:spPr>
         <p:txBody>
-          <a:bodyPr wrap="square" lIns="25400" tIns="12700" rIns="25400" bIns="12700" anchor="ctr">
+          <a:bodyPr wrap="square" anchor="ctr" lIns="25400" rIns="25400" tIns="12700" bIns="12700">
             <a:spAutoFit/>
           </a:bodyPr>
           <a:lstStyle/>
@@ -7306,7 +7183,7 @@
 </file>
 
 <file path=ppt/slides/slide3.xml><?xml version="1.0" encoding="utf-8"?>
-<p:sld xmlns:a="http://schemas.openxmlformats.org/drawingml/2006/main" xmlns:r="http://schemas.openxmlformats.org/officeDocument/2006/relationships" xmlns:p="http://schemas.openxmlformats.org/presentationml/2006/main">
+<p:sld xmlns:a="http://schemas.openxmlformats.org/drawingml/2006/main" xmlns:p="http://schemas.openxmlformats.org/presentationml/2006/main" xmlns:r="http://schemas.openxmlformats.org/officeDocument/2006/relationships">
   <p:cSld>
     <p:bg>
       <p:bgPr>
@@ -7322,14 +7199,7 @@
         <p:cNvGrpSpPr/>
         <p:nvPr/>
       </p:nvGrpSpPr>
-      <p:grpSpPr>
-        <a:xfrm>
-          <a:off x="0" y="0"/>
-          <a:ext cx="0" cy="0"/>
-          <a:chOff x="0" y="0"/>
-          <a:chExt cx="0" cy="0"/>
-        </a:xfrm>
-      </p:grpSpPr>
+      <p:grpSpPr/>
       <p:sp>
         <p:nvSpPr>
           <p:cNvPr id="2" name="Rectangle 1"/>
@@ -7371,7 +7241,6 @@
           <a:lstStyle/>
           <a:p>
             <a:pPr algn="ctr"/>
-            <a:endParaRPr/>
           </a:p>
         </p:txBody>
       </p:sp>
@@ -7392,7 +7261,7 @@
           <a:noFill/>
         </p:spPr>
         <p:txBody>
-          <a:bodyPr wrap="square" lIns="25400" tIns="12700" rIns="25400" bIns="12700" anchor="ctr">
+          <a:bodyPr wrap="square" anchor="ctr" lIns="25400" rIns="25400" tIns="12700" bIns="12700">
             <a:spAutoFit/>
           </a:bodyPr>
           <a:lstStyle/>
@@ -7427,7 +7296,7 @@
           <a:noFill/>
         </p:spPr>
         <p:txBody>
-          <a:bodyPr wrap="square" lIns="25400" tIns="12700" rIns="25400" bIns="12700" anchor="ctr">
+          <a:bodyPr wrap="square" anchor="ctr" lIns="25400" rIns="25400" tIns="12700" bIns="12700">
             <a:spAutoFit/>
           </a:bodyPr>
           <a:lstStyle/>
@@ -7486,7 +7355,6 @@
           <a:lstStyle/>
           <a:p>
             <a:pPr algn="ctr"/>
-            <a:endParaRPr/>
           </a:p>
         </p:txBody>
       </p:sp>
@@ -7499,7 +7367,7 @@
 </file>
 
 <file path=ppt/slides/slide4.xml><?xml version="1.0" encoding="utf-8"?>
-<p:sld xmlns:a="http://schemas.openxmlformats.org/drawingml/2006/main" xmlns:r="http://schemas.openxmlformats.org/officeDocument/2006/relationships" xmlns:p="http://schemas.openxmlformats.org/presentationml/2006/main">
+<p:sld xmlns:a="http://schemas.openxmlformats.org/drawingml/2006/main" xmlns:p="http://schemas.openxmlformats.org/presentationml/2006/main" xmlns:r="http://schemas.openxmlformats.org/officeDocument/2006/relationships">
   <p:cSld>
     <p:bg>
       <p:bgPr>
@@ -7515,14 +7383,7 @@
         <p:cNvGrpSpPr/>
         <p:nvPr/>
       </p:nvGrpSpPr>
-      <p:grpSpPr>
-        <a:xfrm>
-          <a:off x="0" y="0"/>
-          <a:ext cx="0" cy="0"/>
-          <a:chOff x="0" y="0"/>
-          <a:chExt cx="0" cy="0"/>
-        </a:xfrm>
-      </p:grpSpPr>
+      <p:grpSpPr/>
       <p:sp>
         <p:nvSpPr>
           <p:cNvPr id="2" name="Rectangle 1"/>
@@ -7564,7 +7425,6 @@
           <a:lstStyle/>
           <a:p>
             <a:pPr algn="ctr"/>
-            <a:endParaRPr/>
           </a:p>
         </p:txBody>
       </p:sp>
@@ -7585,7 +7445,7 @@
           <a:noFill/>
         </p:spPr>
         <p:txBody>
-          <a:bodyPr wrap="square" lIns="25400" tIns="12700" rIns="25400" bIns="12700" anchor="t">
+          <a:bodyPr wrap="square" anchor="t" lIns="25400" rIns="25400" tIns="12700" bIns="12700">
             <a:spAutoFit/>
           </a:bodyPr>
           <a:lstStyle/>
@@ -7620,7 +7480,7 @@
           <a:noFill/>
         </p:spPr>
         <p:txBody>
-          <a:bodyPr wrap="square" lIns="25400" tIns="12700" rIns="25400" bIns="12700" anchor="t">
+          <a:bodyPr wrap="square" anchor="t" lIns="25400" rIns="25400" tIns="12700" bIns="12700">
             <a:spAutoFit/>
           </a:bodyPr>
           <a:lstStyle/>
@@ -7683,7 +7543,6 @@
           <a:lstStyle/>
           <a:p>
             <a:pPr algn="ctr"/>
-            <a:endParaRPr/>
           </a:p>
         </p:txBody>
       </p:sp>
@@ -7728,7 +7587,6 @@
           <a:lstStyle/>
           <a:p>
             <a:pPr algn="ctr"/>
-            <a:endParaRPr/>
           </a:p>
         </p:txBody>
       </p:sp>
@@ -7944,7 +7802,7 @@
           <a:noFill/>
         </p:spPr>
         <p:txBody>
-          <a:bodyPr wrap="square" lIns="25400" tIns="12700" rIns="25400" bIns="12700" anchor="t">
+          <a:bodyPr wrap="square" anchor="t" lIns="25400" rIns="25400" tIns="12700" bIns="12700">
             <a:spAutoFit/>
           </a:bodyPr>
           <a:lstStyle/>
@@ -8007,7 +7865,6 @@
           <a:lstStyle/>
           <a:p>
             <a:pPr algn="ctr"/>
-            <a:endParaRPr/>
           </a:p>
         </p:txBody>
       </p:sp>
@@ -8028,7 +7885,7 @@
           <a:noFill/>
         </p:spPr>
         <p:txBody>
-          <a:bodyPr wrap="square" lIns="25400" tIns="12700" rIns="25400" bIns="12700" anchor="b">
+          <a:bodyPr wrap="square" anchor="b" lIns="25400" rIns="25400" tIns="12700" bIns="12700">
             <a:spAutoFit/>
           </a:bodyPr>
           <a:lstStyle/>
@@ -8054,7 +7911,7 @@
         </p:nvSpPr>
         <p:spPr>
           <a:xfrm>
-            <a:off x="5669280" y="3472406"/>
+            <a:off x="5669280" y="3419856"/>
             <a:ext cx="2377440" cy="284195"/>
           </a:xfrm>
           <a:prstGeom prst="rect">
@@ -8063,72 +7920,21 @@
           <a:noFill/>
         </p:spPr>
         <p:txBody>
-          <a:bodyPr wrap="square" lIns="25400" tIns="12700" rIns="25400" bIns="12700" anchor="t">
+          <a:bodyPr wrap="square" anchor="t" lIns="25400" rIns="25400" tIns="12700" bIns="12700">
             <a:spAutoFit/>
           </a:bodyPr>
           <a:lstStyle/>
           <a:p>
             <a:pPr algn="ctr"/>
             <a:r>
-              <a:rPr sz="850" b="0" dirty="0">
+              <a:rPr sz="850" b="0">
                 <a:solidFill>
                   <a:srgbClr val="C2613F"/>
                 </a:solidFill>
                 <a:latin typeface="Apple SD Gothic Neo"/>
               </a:rPr>
-              <a:t>+ </a:t>
-            </a:r>
-            <a:r>
-              <a:rPr sz="850" b="0" dirty="0" err="1">
-                <a:solidFill>
-                  <a:srgbClr val="C2613F"/>
-                </a:solidFill>
-                <a:latin typeface="Apple SD Gothic Neo"/>
-              </a:rPr>
-              <a:t>알림·재시도·통계</a:t>
-            </a:r>
-            <a:r>
-              <a:rPr sz="850" b="0" dirty="0">
-                <a:solidFill>
-                  <a:srgbClr val="C2613F"/>
-                </a:solidFill>
-                <a:latin typeface="Apple SD Gothic Neo"/>
-              </a:rPr>
-              <a:t> </a:t>
-            </a:r>
-            <a:r>
-              <a:rPr sz="850" b="0" dirty="0" err="1">
-                <a:solidFill>
-                  <a:srgbClr val="C2613F"/>
-                </a:solidFill>
-                <a:latin typeface="Apple SD Gothic Neo"/>
-              </a:rPr>
-              <a:t>직접</a:t>
-            </a:r>
-            <a:r>
-              <a:rPr sz="850" b="0" dirty="0">
-                <a:solidFill>
-                  <a:srgbClr val="C2613F"/>
-                </a:solidFill>
-                <a:latin typeface="Apple SD Gothic Neo"/>
-              </a:rPr>
-              <a:t> </a:t>
-            </a:r>
-            <a:r>
-              <a:rPr sz="850" b="0" dirty="0" err="1">
-                <a:solidFill>
-                  <a:srgbClr val="C2613F"/>
-                </a:solidFill>
-                <a:latin typeface="Apple SD Gothic Neo"/>
-              </a:rPr>
-              <a:t>구현</a:t>
-            </a:r>
-            <a:endParaRPr sz="850" b="0" dirty="0">
-              <a:solidFill>
-                <a:srgbClr val="C2613F"/>
-              </a:solidFill>
-              <a:latin typeface="Apple SD Gothic Neo"/>
-            </a:endParaRPr>
+              <a:t>+ 알림·재시도·통계 직접 구현</a:t>
+            </a:r>
           </a:p>
         </p:txBody>
       </p:sp>
@@ -8177,7 +7983,6 @@
           <a:lstStyle/>
           <a:p>
             <a:pPr algn="ctr"/>
-            <a:endParaRPr/>
           </a:p>
         </p:txBody>
       </p:sp>
@@ -8198,7 +8003,7 @@
           <a:noFill/>
         </p:spPr>
         <p:txBody>
-          <a:bodyPr wrap="square" lIns="25400" tIns="12700" rIns="25400" bIns="12700" anchor="b">
+          <a:bodyPr wrap="square" anchor="b" lIns="25400" rIns="25400" tIns="12700" bIns="12700">
             <a:spAutoFit/>
           </a:bodyPr>
           <a:lstStyle/>
@@ -8224,7 +8029,7 @@
         </p:nvSpPr>
         <p:spPr>
           <a:xfrm>
-            <a:off x="5669280" y="4313654"/>
+            <a:off x="5669280" y="4261104"/>
             <a:ext cx="2377440" cy="284195"/>
           </a:xfrm>
           <a:prstGeom prst="rect">
@@ -8233,72 +8038,21 @@
           <a:noFill/>
         </p:spPr>
         <p:txBody>
-          <a:bodyPr wrap="square" lIns="25400" tIns="12700" rIns="25400" bIns="12700" anchor="t">
+          <a:bodyPr wrap="square" anchor="t" lIns="25400" rIns="25400" tIns="12700" bIns="12700">
             <a:spAutoFit/>
           </a:bodyPr>
           <a:lstStyle/>
           <a:p>
             <a:pPr algn="ctr"/>
             <a:r>
-              <a:rPr sz="850" b="0" dirty="0">
+              <a:rPr sz="850" b="0">
                 <a:solidFill>
                   <a:srgbClr val="C2613F"/>
                 </a:solidFill>
                 <a:latin typeface="Apple SD Gothic Neo"/>
               </a:rPr>
-              <a:t>+ </a:t>
-            </a:r>
-            <a:r>
-              <a:rPr sz="850" b="0" dirty="0" err="1">
-                <a:solidFill>
-                  <a:srgbClr val="C2613F"/>
-                </a:solidFill>
-                <a:latin typeface="Apple SD Gothic Neo"/>
-              </a:rPr>
-              <a:t>알림·재시도·통계</a:t>
-            </a:r>
-            <a:r>
-              <a:rPr sz="850" b="0" dirty="0">
-                <a:solidFill>
-                  <a:srgbClr val="C2613F"/>
-                </a:solidFill>
-                <a:latin typeface="Apple SD Gothic Neo"/>
-              </a:rPr>
-              <a:t> </a:t>
-            </a:r>
-            <a:r>
-              <a:rPr sz="850" b="0" dirty="0" err="1">
-                <a:solidFill>
-                  <a:srgbClr val="C2613F"/>
-                </a:solidFill>
-                <a:latin typeface="Apple SD Gothic Neo"/>
-              </a:rPr>
-              <a:t>직접</a:t>
-            </a:r>
-            <a:r>
-              <a:rPr sz="850" b="0" dirty="0">
-                <a:solidFill>
-                  <a:srgbClr val="C2613F"/>
-                </a:solidFill>
-                <a:latin typeface="Apple SD Gothic Neo"/>
-              </a:rPr>
-              <a:t> </a:t>
-            </a:r>
-            <a:r>
-              <a:rPr sz="850" b="0" dirty="0" err="1">
-                <a:solidFill>
-                  <a:srgbClr val="C2613F"/>
-                </a:solidFill>
-                <a:latin typeface="Apple SD Gothic Neo"/>
-              </a:rPr>
-              <a:t>구현</a:t>
-            </a:r>
-            <a:endParaRPr sz="850" b="0" dirty="0">
-              <a:solidFill>
-                <a:srgbClr val="C2613F"/>
-              </a:solidFill>
-              <a:latin typeface="Apple SD Gothic Neo"/>
-            </a:endParaRPr>
+              <a:t>+ 알림·재시도·통계 직접 구현</a:t>
+            </a:r>
           </a:p>
         </p:txBody>
       </p:sp>
@@ -8347,7 +8101,6 @@
           <a:lstStyle/>
           <a:p>
             <a:pPr algn="ctr"/>
-            <a:endParaRPr/>
           </a:p>
         </p:txBody>
       </p:sp>
@@ -8368,7 +8121,7 @@
           <a:noFill/>
         </p:spPr>
         <p:txBody>
-          <a:bodyPr wrap="square" lIns="25400" tIns="12700" rIns="25400" bIns="12700" anchor="b">
+          <a:bodyPr wrap="square" anchor="b" lIns="25400" rIns="25400" tIns="12700" bIns="12700">
             <a:spAutoFit/>
           </a:bodyPr>
           <a:lstStyle/>
@@ -8394,7 +8147,7 @@
         </p:nvSpPr>
         <p:spPr>
           <a:xfrm>
-            <a:off x="5669280" y="5154902"/>
+            <a:off x="5669280" y="5102352"/>
             <a:ext cx="2377440" cy="284195"/>
           </a:xfrm>
           <a:prstGeom prst="rect">
@@ -8403,7 +8156,7 @@
           <a:noFill/>
         </p:spPr>
         <p:txBody>
-          <a:bodyPr wrap="square" lIns="25400" tIns="12700" rIns="25400" bIns="12700" anchor="t">
+          <a:bodyPr wrap="square" anchor="t" lIns="25400" rIns="25400" tIns="12700" bIns="12700">
             <a:spAutoFit/>
           </a:bodyPr>
           <a:lstStyle/>
@@ -8462,7 +8215,6 @@
           <a:lstStyle/>
           <a:p>
             <a:pPr algn="ctr"/>
-            <a:endParaRPr/>
           </a:p>
         </p:txBody>
       </p:sp>
@@ -8483,7 +8235,7 @@
           <a:noFill/>
         </p:spPr>
         <p:txBody>
-          <a:bodyPr wrap="square" lIns="25400" tIns="12700" rIns="25400" bIns="12700" anchor="t">
+          <a:bodyPr wrap="square" anchor="t" lIns="25400" rIns="25400" tIns="12700" bIns="12700">
             <a:spAutoFit/>
           </a:bodyPr>
           <a:lstStyle/>
@@ -8546,7 +8298,6 @@
           <a:lstStyle/>
           <a:p>
             <a:pPr algn="ctr"/>
-            <a:endParaRPr/>
           </a:p>
         </p:txBody>
       </p:sp>
@@ -8567,7 +8318,7 @@
           <a:noFill/>
         </p:spPr>
         <p:txBody>
-          <a:bodyPr wrap="square" lIns="25400" tIns="12700" rIns="25400" bIns="12700" anchor="ctr">
+          <a:bodyPr wrap="square" anchor="ctr" lIns="25400" rIns="25400" tIns="12700" bIns="12700">
             <a:spAutoFit/>
           </a:bodyPr>
           <a:lstStyle/>
@@ -8666,7 +8417,6 @@
           <a:lstStyle/>
           <a:p>
             <a:pPr algn="ctr"/>
-            <a:endParaRPr/>
           </a:p>
         </p:txBody>
       </p:sp>
@@ -8687,7 +8437,7 @@
           <a:noFill/>
         </p:spPr>
         <p:txBody>
-          <a:bodyPr wrap="square" lIns="25400" tIns="12700" rIns="25400" bIns="12700" anchor="ctr">
+          <a:bodyPr wrap="square" anchor="ctr" lIns="25400" rIns="25400" tIns="12700" bIns="12700">
             <a:spAutoFit/>
           </a:bodyPr>
           <a:lstStyle/>
@@ -8786,7 +8536,6 @@
           <a:lstStyle/>
           <a:p>
             <a:pPr algn="ctr"/>
-            <a:endParaRPr/>
           </a:p>
         </p:txBody>
       </p:sp>
@@ -8807,7 +8556,7 @@
           <a:noFill/>
         </p:spPr>
         <p:txBody>
-          <a:bodyPr wrap="square" lIns="25400" tIns="12700" rIns="25400" bIns="12700" anchor="ctr">
+          <a:bodyPr wrap="square" anchor="ctr" lIns="25400" rIns="25400" tIns="12700" bIns="12700">
             <a:spAutoFit/>
           </a:bodyPr>
           <a:lstStyle/>
@@ -8904,7 +8653,6 @@
           <a:lstStyle/>
           <a:p>
             <a:pPr algn="ctr"/>
-            <a:endParaRPr/>
           </a:p>
         </p:txBody>
       </p:sp>
@@ -8925,7 +8673,7 @@
           <a:noFill/>
         </p:spPr>
         <p:txBody>
-          <a:bodyPr wrap="square" lIns="25400" tIns="12700" rIns="25400" bIns="12700" anchor="ctr">
+          <a:bodyPr wrap="square" anchor="ctr" lIns="25400" rIns="25400" tIns="12700" bIns="12700">
             <a:spAutoFit/>
           </a:bodyPr>
           <a:lstStyle/>
@@ -9022,7 +8770,6 @@
           <a:lstStyle/>
           <a:p>
             <a:pPr algn="ctr"/>
-            <a:endParaRPr/>
           </a:p>
         </p:txBody>
       </p:sp>
@@ -9043,7 +8790,7 @@
           <a:noFill/>
         </p:spPr>
         <p:txBody>
-          <a:bodyPr wrap="square" lIns="25400" tIns="12700" rIns="25400" bIns="12700" anchor="ctr">
+          <a:bodyPr wrap="square" anchor="ctr" lIns="25400" rIns="25400" tIns="12700" bIns="12700">
             <a:spAutoFit/>
           </a:bodyPr>
           <a:lstStyle/>
@@ -9139,7 +8886,6 @@
           <a:lstStyle/>
           <a:p>
             <a:pPr algn="ctr"/>
-            <a:endParaRPr/>
           </a:p>
         </p:txBody>
       </p:sp>
@@ -9160,7 +8906,7 @@
           <a:noFill/>
         </p:spPr>
         <p:txBody>
-          <a:bodyPr wrap="square" lIns="25400" tIns="12700" rIns="25400" bIns="12700" anchor="ctr">
+          <a:bodyPr wrap="square" anchor="ctr" lIns="25400" rIns="25400" tIns="12700" bIns="12700">
             <a:spAutoFit/>
           </a:bodyPr>
           <a:lstStyle/>
@@ -9256,7 +9002,6 @@
           <a:lstStyle/>
           <a:p>
             <a:pPr algn="ctr"/>
-            <a:endParaRPr/>
           </a:p>
         </p:txBody>
       </p:sp>
@@ -9277,7 +9022,7 @@
           <a:noFill/>
         </p:spPr>
         <p:txBody>
-          <a:bodyPr wrap="square" lIns="25400" tIns="12700" rIns="25400" bIns="12700" anchor="ctr">
+          <a:bodyPr wrap="square" anchor="ctr" lIns="25400" rIns="25400" tIns="12700" bIns="12700">
             <a:spAutoFit/>
           </a:bodyPr>
           <a:lstStyle/>
@@ -9312,7 +9057,7 @@
           <a:noFill/>
         </p:spPr>
         <p:txBody>
-          <a:bodyPr wrap="square" lIns="25400" tIns="12700" rIns="25400" bIns="12700" anchor="t">
+          <a:bodyPr wrap="square" anchor="t" lIns="25400" rIns="25400" tIns="12700" bIns="12700">
             <a:spAutoFit/>
           </a:bodyPr>
           <a:lstStyle/>
@@ -9339,7 +9084,7 @@
 </file>
 
 <file path=ppt/slides/slide5.xml><?xml version="1.0" encoding="utf-8"?>
-<p:sld xmlns:a="http://schemas.openxmlformats.org/drawingml/2006/main" xmlns:r="http://schemas.openxmlformats.org/officeDocument/2006/relationships" xmlns:p="http://schemas.openxmlformats.org/presentationml/2006/main">
+<p:sld xmlns:a="http://schemas.openxmlformats.org/drawingml/2006/main" xmlns:p="http://schemas.openxmlformats.org/presentationml/2006/main" xmlns:r="http://schemas.openxmlformats.org/officeDocument/2006/relationships">
   <p:cSld>
     <p:bg>
       <p:bgPr>
@@ -9355,14 +9100,7 @@
         <p:cNvGrpSpPr/>
         <p:nvPr/>
       </p:nvGrpSpPr>
-      <p:grpSpPr>
-        <a:xfrm>
-          <a:off x="0" y="0"/>
-          <a:ext cx="0" cy="0"/>
-          <a:chOff x="0" y="0"/>
-          <a:chExt cx="0" cy="0"/>
-        </a:xfrm>
-      </p:grpSpPr>
+      <p:grpSpPr/>
       <p:sp>
         <p:nvSpPr>
           <p:cNvPr id="2" name="Rectangle 1"/>
@@ -9404,7 +9142,6 @@
           <a:lstStyle/>
           <a:p>
             <a:pPr algn="ctr"/>
-            <a:endParaRPr/>
           </a:p>
         </p:txBody>
       </p:sp>
@@ -9425,7 +9162,7 @@
           <a:noFill/>
         </p:spPr>
         <p:txBody>
-          <a:bodyPr wrap="square" lIns="25400" tIns="12700" rIns="25400" bIns="12700" anchor="ctr">
+          <a:bodyPr wrap="square" anchor="ctr" lIns="25400" rIns="25400" tIns="12700" bIns="12700">
             <a:spAutoFit/>
           </a:bodyPr>
           <a:lstStyle/>
@@ -9460,7 +9197,7 @@
           <a:noFill/>
         </p:spPr>
         <p:txBody>
-          <a:bodyPr wrap="square" lIns="25400" tIns="12700" rIns="25400" bIns="12700" anchor="ctr">
+          <a:bodyPr wrap="square" anchor="ctr" lIns="25400" rIns="25400" tIns="12700" bIns="12700">
             <a:spAutoFit/>
           </a:bodyPr>
           <a:lstStyle/>
@@ -9519,7 +9256,6 @@
           <a:lstStyle/>
           <a:p>
             <a:pPr algn="ctr"/>
-            <a:endParaRPr/>
           </a:p>
         </p:txBody>
       </p:sp>
@@ -9532,7 +9268,7 @@
 </file>
 
 <file path=ppt/slides/slide6.xml><?xml version="1.0" encoding="utf-8"?>
-<p:sld xmlns:a="http://schemas.openxmlformats.org/drawingml/2006/main" xmlns:r="http://schemas.openxmlformats.org/officeDocument/2006/relationships" xmlns:p="http://schemas.openxmlformats.org/presentationml/2006/main">
+<p:sld xmlns:a="http://schemas.openxmlformats.org/drawingml/2006/main" xmlns:p="http://schemas.openxmlformats.org/presentationml/2006/main" xmlns:r="http://schemas.openxmlformats.org/officeDocument/2006/relationships">
   <p:cSld>
     <p:bg>
       <p:bgPr>
@@ -9548,14 +9284,7 @@
         <p:cNvGrpSpPr/>
         <p:nvPr/>
       </p:nvGrpSpPr>
-      <p:grpSpPr>
-        <a:xfrm>
-          <a:off x="0" y="0"/>
-          <a:ext cx="0" cy="0"/>
-          <a:chOff x="0" y="0"/>
-          <a:chExt cx="0" cy="0"/>
-        </a:xfrm>
-      </p:grpSpPr>
+      <p:grpSpPr/>
       <p:sp>
         <p:nvSpPr>
           <p:cNvPr id="2" name="Rectangle 1"/>
@@ -9597,7 +9326,6 @@
           <a:lstStyle/>
           <a:p>
             <a:pPr algn="ctr"/>
-            <a:endParaRPr/>
           </a:p>
         </p:txBody>
       </p:sp>
@@ -9618,7 +9346,7 @@
           <a:noFill/>
         </p:spPr>
         <p:txBody>
-          <a:bodyPr wrap="square" lIns="25400" tIns="12700" rIns="25400" bIns="12700" anchor="t">
+          <a:bodyPr wrap="square" anchor="t" lIns="25400" rIns="25400" tIns="12700" bIns="12700">
             <a:spAutoFit/>
           </a:bodyPr>
           <a:lstStyle/>
@@ -9653,7 +9381,7 @@
           <a:noFill/>
         </p:spPr>
         <p:txBody>
-          <a:bodyPr wrap="square" lIns="25400" tIns="12700" rIns="25400" bIns="12700" anchor="t">
+          <a:bodyPr wrap="square" anchor="t" lIns="25400" rIns="25400" tIns="12700" bIns="12700">
             <a:spAutoFit/>
           </a:bodyPr>
           <a:lstStyle/>
@@ -9716,7 +9444,6 @@
           <a:lstStyle/>
           <a:p>
             <a:pPr algn="ctr"/>
-            <a:endParaRPr/>
           </a:p>
         </p:txBody>
       </p:sp>
@@ -9761,7 +9488,6 @@
           <a:lstStyle/>
           <a:p>
             <a:pPr algn="ctr"/>
-            <a:endParaRPr/>
           </a:p>
         </p:txBody>
       </p:sp>
@@ -9977,7 +9703,7 @@
           <a:noFill/>
         </p:spPr>
         <p:txBody>
-          <a:bodyPr wrap="square" lIns="25400" tIns="12700" rIns="25400" bIns="12700" anchor="t">
+          <a:bodyPr wrap="square" anchor="t" lIns="25400" rIns="25400" tIns="12700" bIns="12700">
             <a:spAutoFit/>
           </a:bodyPr>
           <a:lstStyle/>
@@ -10038,7 +9764,6 @@
           <a:lstStyle/>
           <a:p>
             <a:pPr algn="ctr"/>
-            <a:endParaRPr/>
           </a:p>
         </p:txBody>
       </p:sp>
@@ -10085,7 +9810,6 @@
           <a:lstStyle/>
           <a:p>
             <a:pPr algn="ctr"/>
-            <a:endParaRPr/>
           </a:p>
         </p:txBody>
       </p:sp>
@@ -10132,7 +9856,6 @@
           <a:lstStyle/>
           <a:p>
             <a:pPr algn="ctr"/>
-            <a:endParaRPr/>
           </a:p>
         </p:txBody>
       </p:sp>
@@ -10179,7 +9902,6 @@
           <a:lstStyle/>
           <a:p>
             <a:pPr algn="ctr"/>
-            <a:endParaRPr/>
           </a:p>
         </p:txBody>
       </p:sp>
@@ -10191,7 +9913,7 @@
         </p:nvSpPr>
         <p:spPr>
           <a:xfrm>
-            <a:off x="5532120" y="3216374"/>
+            <a:off x="5532120" y="3163824"/>
             <a:ext cx="2743200" cy="274320"/>
           </a:xfrm>
           <a:prstGeom prst="rect">
@@ -10200,14 +9922,14 @@
           <a:noFill/>
         </p:spPr>
         <p:txBody>
-          <a:bodyPr wrap="square" lIns="25400" tIns="12700" rIns="25400" bIns="12700" anchor="t">
+          <a:bodyPr wrap="square" anchor="t" lIns="25400" rIns="25400" tIns="12700" bIns="12700">
             <a:spAutoFit/>
           </a:bodyPr>
           <a:lstStyle/>
           <a:p>
             <a:pPr algn="ctr"/>
             <a:r>
-              <a:rPr sz="900" b="1" dirty="0">
+              <a:rPr sz="900" b="1">
                 <a:solidFill>
                   <a:srgbClr val="33312B"/>
                 </a:solidFill>
@@ -10226,7 +9948,7 @@
         </p:nvSpPr>
         <p:spPr>
           <a:xfrm>
-            <a:off x="5843016" y="3527270"/>
+            <a:off x="5843016" y="3474720"/>
             <a:ext cx="2121408" cy="274320"/>
           </a:xfrm>
           <a:prstGeom prst="rect">
@@ -10235,7 +9957,7 @@
           <a:noFill/>
         </p:spPr>
         <p:txBody>
-          <a:bodyPr wrap="square" lIns="25400" tIns="12700" rIns="25400" bIns="12700" anchor="t">
+          <a:bodyPr wrap="square" anchor="t" lIns="25400" rIns="25400" tIns="12700" bIns="12700">
             <a:spAutoFit/>
           </a:bodyPr>
           <a:lstStyle/>
@@ -10261,7 +9983,7 @@
         </p:nvSpPr>
         <p:spPr>
           <a:xfrm>
-            <a:off x="6153912" y="3838165"/>
+            <a:off x="6153912" y="3785615"/>
             <a:ext cx="1499616" cy="274320"/>
           </a:xfrm>
           <a:prstGeom prst="rect">
@@ -10270,7 +9992,7 @@
           <a:noFill/>
         </p:spPr>
         <p:txBody>
-          <a:bodyPr wrap="square" lIns="25400" tIns="12700" rIns="25400" bIns="12700" anchor="t">
+          <a:bodyPr wrap="square" anchor="t" lIns="25400" rIns="25400" tIns="12700" bIns="12700">
             <a:spAutoFit/>
           </a:bodyPr>
           <a:lstStyle/>
@@ -10305,7 +10027,7 @@
           <a:noFill/>
         </p:spPr>
         <p:txBody>
-          <a:bodyPr wrap="square" lIns="25400" tIns="12700" rIns="25400" bIns="12700" anchor="t">
+          <a:bodyPr wrap="square" anchor="t" lIns="25400" rIns="25400" tIns="12700" bIns="12700">
             <a:spAutoFit/>
           </a:bodyPr>
           <a:lstStyle/>
@@ -10340,7 +10062,7 @@
           <a:noFill/>
         </p:spPr>
         <p:txBody>
-          <a:bodyPr wrap="square" lIns="25400" tIns="12700" rIns="25400" bIns="12700" anchor="t">
+          <a:bodyPr wrap="square" anchor="t" lIns="25400" rIns="25400" tIns="12700" bIns="12700">
             <a:spAutoFit/>
           </a:bodyPr>
           <a:lstStyle/>
@@ -10401,7 +10123,6 @@
           <a:lstStyle/>
           <a:p>
             <a:pPr algn="ctr"/>
-            <a:endParaRPr/>
           </a:p>
         </p:txBody>
       </p:sp>
@@ -10422,7 +10143,7 @@
           <a:noFill/>
         </p:spPr>
         <p:txBody>
-          <a:bodyPr wrap="square" lIns="25400" tIns="12700" rIns="25400" bIns="12700" anchor="ctr">
+          <a:bodyPr wrap="square" anchor="ctr" lIns="25400" rIns="25400" tIns="12700" bIns="12700">
             <a:spAutoFit/>
           </a:bodyPr>
           <a:lstStyle/>
@@ -10485,7 +10206,6 @@
           <a:lstStyle/>
           <a:p>
             <a:pPr algn="ctr"/>
-            <a:endParaRPr/>
           </a:p>
         </p:txBody>
       </p:sp>
@@ -10506,7 +10226,7 @@
           <a:noFill/>
         </p:spPr>
         <p:txBody>
-          <a:bodyPr wrap="square" lIns="25400" tIns="12700" rIns="25400" bIns="12700" anchor="ctr">
+          <a:bodyPr wrap="square" anchor="ctr" lIns="25400" rIns="25400" tIns="12700" bIns="12700">
             <a:spAutoFit/>
           </a:bodyPr>
           <a:lstStyle/>
@@ -10569,7 +10289,6 @@
           <a:lstStyle/>
           <a:p>
             <a:pPr algn="ctr"/>
-            <a:endParaRPr/>
           </a:p>
         </p:txBody>
       </p:sp>
@@ -10590,7 +10309,7 @@
           <a:noFill/>
         </p:spPr>
         <p:txBody>
-          <a:bodyPr wrap="square" lIns="25400" tIns="12700" rIns="25400" bIns="12700" anchor="ctr">
+          <a:bodyPr wrap="square" anchor="ctr" lIns="25400" rIns="25400" tIns="12700" bIns="12700">
             <a:spAutoFit/>
           </a:bodyPr>
           <a:lstStyle/>
@@ -10653,7 +10372,6 @@
           <a:lstStyle/>
           <a:p>
             <a:pPr algn="ctr"/>
-            <a:endParaRPr/>
           </a:p>
         </p:txBody>
       </p:sp>
@@ -10674,7 +10392,7 @@
           <a:noFill/>
         </p:spPr>
         <p:txBody>
-          <a:bodyPr wrap="square" lIns="25400" tIns="12700" rIns="25400" bIns="12700" anchor="ctr">
+          <a:bodyPr wrap="square" anchor="ctr" lIns="25400" rIns="25400" tIns="12700" bIns="12700">
             <a:spAutoFit/>
           </a:bodyPr>
           <a:lstStyle/>
@@ -10737,7 +10455,6 @@
           <a:lstStyle/>
           <a:p>
             <a:pPr algn="ctr"/>
-            <a:endParaRPr/>
           </a:p>
         </p:txBody>
       </p:sp>
@@ -10758,7 +10475,7 @@
           <a:noFill/>
         </p:spPr>
         <p:txBody>
-          <a:bodyPr wrap="square" lIns="25400" tIns="12700" rIns="25400" bIns="12700" anchor="ctr">
+          <a:bodyPr wrap="square" anchor="ctr" lIns="25400" rIns="25400" tIns="12700" bIns="12700">
             <a:spAutoFit/>
           </a:bodyPr>
           <a:lstStyle/>
@@ -10821,7 +10538,6 @@
           <a:lstStyle/>
           <a:p>
             <a:pPr algn="ctr"/>
-            <a:endParaRPr/>
           </a:p>
         </p:txBody>
       </p:sp>
@@ -10842,7 +10558,7 @@
           <a:noFill/>
         </p:spPr>
         <p:txBody>
-          <a:bodyPr wrap="square" lIns="25400" tIns="12700" rIns="25400" bIns="12700" anchor="ctr">
+          <a:bodyPr wrap="square" anchor="ctr" lIns="25400" rIns="25400" tIns="12700" bIns="12700">
             <a:spAutoFit/>
           </a:bodyPr>
           <a:lstStyle/>
@@ -10905,7 +10621,6 @@
           <a:lstStyle/>
           <a:p>
             <a:pPr algn="ctr"/>
-            <a:endParaRPr/>
           </a:p>
         </p:txBody>
       </p:sp>
@@ -10926,7 +10641,7 @@
           <a:noFill/>
         </p:spPr>
         <p:txBody>
-          <a:bodyPr wrap="square" lIns="25400" tIns="12700" rIns="25400" bIns="12700" anchor="ctr">
+          <a:bodyPr wrap="square" anchor="ctr" lIns="25400" rIns="25400" tIns="12700" bIns="12700">
             <a:spAutoFit/>
           </a:bodyPr>
           <a:lstStyle/>
@@ -10997,7 +10712,7 @@
           <a:noFill/>
         </p:spPr>
         <p:txBody>
-          <a:bodyPr wrap="square" lIns="25400" tIns="12700" rIns="25400" bIns="12700" anchor="t">
+          <a:bodyPr wrap="square" anchor="t" lIns="25400" rIns="25400" tIns="12700" bIns="12700">
             <a:spAutoFit/>
           </a:bodyPr>
           <a:lstStyle/>
@@ -11024,7 +10739,7 @@
 </file>
 
 <file path=ppt/slides/slide7.xml><?xml version="1.0" encoding="utf-8"?>
-<p:sld xmlns:a="http://schemas.openxmlformats.org/drawingml/2006/main" xmlns:r="http://schemas.openxmlformats.org/officeDocument/2006/relationships" xmlns:p="http://schemas.openxmlformats.org/presentationml/2006/main">
+<p:sld xmlns:a="http://schemas.openxmlformats.org/drawingml/2006/main" xmlns:p="http://schemas.openxmlformats.org/presentationml/2006/main" xmlns:r="http://schemas.openxmlformats.org/officeDocument/2006/relationships">
   <p:cSld>
     <p:bg>
       <p:bgPr>
@@ -11040,14 +10755,7 @@
         <p:cNvGrpSpPr/>
         <p:nvPr/>
       </p:nvGrpSpPr>
-      <p:grpSpPr>
-        <a:xfrm>
-          <a:off x="0" y="0"/>
-          <a:ext cx="0" cy="0"/>
-          <a:chOff x="0" y="0"/>
-          <a:chExt cx="0" cy="0"/>
-        </a:xfrm>
-      </p:grpSpPr>
+      <p:grpSpPr/>
       <p:sp>
         <p:nvSpPr>
           <p:cNvPr id="2" name="Rectangle 1"/>
@@ -11089,7 +10797,6 @@
           <a:lstStyle/>
           <a:p>
             <a:pPr algn="ctr"/>
-            <a:endParaRPr/>
           </a:p>
         </p:txBody>
       </p:sp>
@@ -11110,7 +10817,7 @@
           <a:noFill/>
         </p:spPr>
         <p:txBody>
-          <a:bodyPr wrap="square" lIns="25400" tIns="12700" rIns="25400" bIns="12700" anchor="ctr">
+          <a:bodyPr wrap="square" anchor="ctr" lIns="25400" rIns="25400" tIns="12700" bIns="12700">
             <a:spAutoFit/>
           </a:bodyPr>
           <a:lstStyle/>
@@ -11145,7 +10852,7 @@
           <a:noFill/>
         </p:spPr>
         <p:txBody>
-          <a:bodyPr wrap="square" lIns="25400" tIns="12700" rIns="25400" bIns="12700" anchor="ctr">
+          <a:bodyPr wrap="square" anchor="ctr" lIns="25400" rIns="25400" tIns="12700" bIns="12700">
             <a:spAutoFit/>
           </a:bodyPr>
           <a:lstStyle/>
@@ -11204,7 +10911,6 @@
           <a:lstStyle/>
           <a:p>
             <a:pPr algn="ctr"/>
-            <a:endParaRPr/>
           </a:p>
         </p:txBody>
       </p:sp>
@@ -11217,7 +10923,7 @@
 </file>
 
 <file path=ppt/slides/slide8.xml><?xml version="1.0" encoding="utf-8"?>
-<p:sld xmlns:a="http://schemas.openxmlformats.org/drawingml/2006/main" xmlns:r="http://schemas.openxmlformats.org/officeDocument/2006/relationships" xmlns:p="http://schemas.openxmlformats.org/presentationml/2006/main">
+<p:sld xmlns:a="http://schemas.openxmlformats.org/drawingml/2006/main" xmlns:p="http://schemas.openxmlformats.org/presentationml/2006/main" xmlns:r="http://schemas.openxmlformats.org/officeDocument/2006/relationships">
   <p:cSld>
     <p:bg>
       <p:bgPr>
@@ -11233,14 +10939,7 @@
         <p:cNvGrpSpPr/>
         <p:nvPr/>
       </p:nvGrpSpPr>
-      <p:grpSpPr>
-        <a:xfrm>
-          <a:off x="0" y="0"/>
-          <a:ext cx="0" cy="0"/>
-          <a:chOff x="0" y="0"/>
-          <a:chExt cx="0" cy="0"/>
-        </a:xfrm>
-      </p:grpSpPr>
+      <p:grpSpPr/>
       <p:sp>
         <p:nvSpPr>
           <p:cNvPr id="2" name="Rectangle 1"/>
@@ -11282,7 +10981,6 @@
           <a:lstStyle/>
           <a:p>
             <a:pPr algn="ctr"/>
-            <a:endParaRPr/>
           </a:p>
         </p:txBody>
       </p:sp>
@@ -11303,7 +11001,7 @@
           <a:noFill/>
         </p:spPr>
         <p:txBody>
-          <a:bodyPr wrap="square" lIns="25400" tIns="12700" rIns="25400" bIns="12700" anchor="t">
+          <a:bodyPr wrap="square" anchor="t" lIns="25400" rIns="25400" tIns="12700" bIns="12700">
             <a:spAutoFit/>
           </a:bodyPr>
           <a:lstStyle/>
@@ -11338,7 +11036,7 @@
           <a:noFill/>
         </p:spPr>
         <p:txBody>
-          <a:bodyPr wrap="square" lIns="25400" tIns="12700" rIns="25400" bIns="12700" anchor="t">
+          <a:bodyPr wrap="square" anchor="t" lIns="25400" rIns="25400" tIns="12700" bIns="12700">
             <a:spAutoFit/>
           </a:bodyPr>
           <a:lstStyle/>
@@ -11401,7 +11099,6 @@
           <a:lstStyle/>
           <a:p>
             <a:pPr algn="ctr"/>
-            <a:endParaRPr/>
           </a:p>
         </p:txBody>
       </p:sp>
@@ -11446,7 +11143,6 @@
           <a:lstStyle/>
           <a:p>
             <a:pPr algn="ctr"/>
-            <a:endParaRPr/>
           </a:p>
         </p:txBody>
       </p:sp>
@@ -11493,7 +11189,7 @@
                 </a:solidFill>
                 <a:latin typeface="Apple SD Gothic Neo"/>
               </a:rPr>
-              <a:t>Kafka 기반 비동기 파이프라인으로 '접수 → 발송 → 집계'를 분리해, 발송 지연이 알림 접수 응답을 막지 않도록 설계</a:t>
+              <a:t>notification과 delivery result를 Outbox로 저장해, DB commit 뒤에도 Kafka 재발행 경로를 남기는 비동기 파이프라인</a:t>
             </a:r>
           </a:p>
         </p:txBody>
@@ -11506,7 +11202,7 @@
         </p:nvSpPr>
         <p:spPr>
           <a:xfrm>
-            <a:off x="640080" y="3122516"/>
+            <a:off x="640080" y="2807208"/>
             <a:ext cx="1143000" cy="713232"/>
           </a:xfrm>
           <a:prstGeom prst="roundRect">
@@ -11543,7 +11239,6 @@
           <a:lstStyle/>
           <a:p>
             <a:pPr algn="ctr"/>
-            <a:endParaRPr/>
           </a:p>
         </p:txBody>
       </p:sp>
@@ -11555,7 +11250,7 @@
         </p:nvSpPr>
         <p:spPr>
           <a:xfrm>
-            <a:off x="640080" y="3122516"/>
+            <a:off x="640080" y="2807208"/>
             <a:ext cx="1143000" cy="713232"/>
           </a:xfrm>
           <a:prstGeom prst="rect">
@@ -11564,7 +11259,7 @@
           <a:noFill/>
         </p:spPr>
         <p:txBody>
-          <a:bodyPr wrap="square" lIns="25400" tIns="12700" rIns="25400" bIns="12700" anchor="ctr">
+          <a:bodyPr wrap="square" anchor="ctr" lIns="25400" rIns="25400" tIns="12700" bIns="12700">
             <a:spAutoFit/>
           </a:bodyPr>
           <a:lstStyle/>
@@ -11590,7 +11285,7 @@
         </p:nvSpPr>
         <p:spPr>
           <a:xfrm>
-            <a:off x="2057400" y="3122516"/>
+            <a:off x="2057400" y="2807208"/>
             <a:ext cx="1234440" cy="713232"/>
           </a:xfrm>
           <a:prstGeom prst="roundRect">
@@ -11625,7 +11320,6 @@
           <a:lstStyle/>
           <a:p>
             <a:pPr algn="ctr"/>
-            <a:endParaRPr/>
           </a:p>
         </p:txBody>
       </p:sp>
@@ -11637,7 +11331,7 @@
         </p:nvSpPr>
         <p:spPr>
           <a:xfrm>
-            <a:off x="2057400" y="3122516"/>
+            <a:off x="2057400" y="2807208"/>
             <a:ext cx="1234440" cy="713232"/>
           </a:xfrm>
           <a:prstGeom prst="rect">
@@ -11646,7 +11340,7 @@
           <a:noFill/>
         </p:spPr>
         <p:txBody>
-          <a:bodyPr wrap="square" lIns="25400" tIns="12700" rIns="25400" bIns="12700" anchor="ctr">
+          <a:bodyPr wrap="square" anchor="ctr" lIns="25400" rIns="25400" tIns="12700" bIns="12700">
             <a:spAutoFit/>
           </a:bodyPr>
           <a:lstStyle/>
@@ -11673,7 +11367,7 @@
         </p:nvSpPr>
         <p:spPr>
           <a:xfrm>
-            <a:off x="3611880" y="3122516"/>
+            <a:off x="3611880" y="2807208"/>
             <a:ext cx="1417320" cy="713232"/>
           </a:xfrm>
           <a:prstGeom prst="roundRect">
@@ -11710,7 +11404,6 @@
           <a:lstStyle/>
           <a:p>
             <a:pPr algn="ctr"/>
-            <a:endParaRPr/>
           </a:p>
         </p:txBody>
       </p:sp>
@@ -11722,7 +11415,7 @@
         </p:nvSpPr>
         <p:spPr>
           <a:xfrm>
-            <a:off x="3611880" y="3122516"/>
+            <a:off x="3611880" y="2807208"/>
             <a:ext cx="1417320" cy="713232"/>
           </a:xfrm>
           <a:prstGeom prst="rect">
@@ -11731,7 +11424,7 @@
           <a:noFill/>
         </p:spPr>
         <p:txBody>
-          <a:bodyPr wrap="square" lIns="25400" tIns="12700" rIns="25400" bIns="12700" anchor="ctr">
+          <a:bodyPr wrap="square" anchor="ctr" lIns="25400" rIns="25400" tIns="12700" bIns="12700">
             <a:spAutoFit/>
           </a:bodyPr>
           <a:lstStyle/>
@@ -11758,7 +11451,7 @@
         </p:nvSpPr>
         <p:spPr>
           <a:xfrm>
-            <a:off x="5349240" y="3076796"/>
+            <a:off x="5349240" y="2761488"/>
             <a:ext cx="1280160" cy="804672"/>
           </a:xfrm>
           <a:prstGeom prst="can">
@@ -11791,7 +11484,6 @@
           <a:lstStyle/>
           <a:p>
             <a:pPr algn="ctr"/>
-            <a:endParaRPr/>
           </a:p>
         </p:txBody>
       </p:sp>
@@ -11803,7 +11495,7 @@
         </p:nvSpPr>
         <p:spPr>
           <a:xfrm>
-            <a:off x="5349240" y="3122516"/>
+            <a:off x="5349240" y="2807208"/>
             <a:ext cx="1280160" cy="274320"/>
           </a:xfrm>
           <a:prstGeom prst="rect">
@@ -11812,7 +11504,7 @@
           <a:noFill/>
         </p:spPr>
         <p:txBody>
-          <a:bodyPr wrap="square" lIns="25400" tIns="12700" rIns="25400" bIns="12700" anchor="t">
+          <a:bodyPr wrap="square" anchor="t" lIns="25400" rIns="25400" tIns="12700" bIns="12700">
             <a:spAutoFit/>
           </a:bodyPr>
           <a:lstStyle/>
@@ -11838,7 +11530,7 @@
         </p:nvSpPr>
         <p:spPr>
           <a:xfrm>
-            <a:off x="5349240" y="3360260"/>
+            <a:off x="5349240" y="3044952"/>
             <a:ext cx="1280160" cy="457200"/>
           </a:xfrm>
           <a:prstGeom prst="rect">
@@ -11847,7 +11539,7 @@
           <a:noFill/>
         </p:spPr>
         <p:txBody>
-          <a:bodyPr wrap="square" lIns="25400" tIns="12700" rIns="25400" bIns="12700" anchor="ctr">
+          <a:bodyPr wrap="square" anchor="ctr" lIns="25400" rIns="25400" tIns="12700" bIns="12700">
             <a:spAutoFit/>
           </a:bodyPr>
           <a:lstStyle/>
@@ -11873,7 +11565,7 @@
         </p:nvSpPr>
         <p:spPr>
           <a:xfrm>
-            <a:off x="6995160" y="3122516"/>
+            <a:off x="6995160" y="2807208"/>
             <a:ext cx="1371600" cy="713232"/>
           </a:xfrm>
           <a:prstGeom prst="roundRect">
@@ -11910,7 +11602,6 @@
           <a:lstStyle/>
           <a:p>
             <a:pPr algn="ctr"/>
-            <a:endParaRPr/>
           </a:p>
         </p:txBody>
       </p:sp>
@@ -11922,7 +11613,7 @@
         </p:nvSpPr>
         <p:spPr>
           <a:xfrm>
-            <a:off x="6995160" y="3122516"/>
+            <a:off x="6995160" y="2807208"/>
             <a:ext cx="1371600" cy="713232"/>
           </a:xfrm>
           <a:prstGeom prst="rect">
@@ -11931,7 +11622,7 @@
           <a:noFill/>
         </p:spPr>
         <p:txBody>
-          <a:bodyPr wrap="square" lIns="25400" tIns="12700" rIns="25400" bIns="12700" anchor="ctr">
+          <a:bodyPr wrap="square" anchor="ctr" lIns="25400" rIns="25400" tIns="12700" bIns="12700">
             <a:spAutoFit/>
           </a:bodyPr>
           <a:lstStyle/>
@@ -11958,7 +11649,7 @@
         </p:nvSpPr>
         <p:spPr>
           <a:xfrm>
-            <a:off x="8686800" y="3076796"/>
+            <a:off x="8686800" y="2761488"/>
             <a:ext cx="1280160" cy="804672"/>
           </a:xfrm>
           <a:prstGeom prst="can">
@@ -11991,7 +11682,6 @@
           <a:lstStyle/>
           <a:p>
             <a:pPr algn="ctr"/>
-            <a:endParaRPr/>
           </a:p>
         </p:txBody>
       </p:sp>
@@ -12003,7 +11693,7 @@
         </p:nvSpPr>
         <p:spPr>
           <a:xfrm>
-            <a:off x="8686800" y="3122516"/>
+            <a:off x="8686800" y="2807208"/>
             <a:ext cx="1280160" cy="274320"/>
           </a:xfrm>
           <a:prstGeom prst="rect">
@@ -12012,7 +11702,7 @@
           <a:noFill/>
         </p:spPr>
         <p:txBody>
-          <a:bodyPr wrap="square" lIns="25400" tIns="12700" rIns="25400" bIns="12700" anchor="t">
+          <a:bodyPr wrap="square" anchor="t" lIns="25400" rIns="25400" tIns="12700" bIns="12700">
             <a:spAutoFit/>
           </a:bodyPr>
           <a:lstStyle/>
@@ -12038,7 +11728,7 @@
         </p:nvSpPr>
         <p:spPr>
           <a:xfrm>
-            <a:off x="8686800" y="3360260"/>
+            <a:off x="8686800" y="3044952"/>
             <a:ext cx="1280160" cy="457200"/>
           </a:xfrm>
           <a:prstGeom prst="rect">
@@ -12047,7 +11737,7 @@
           <a:noFill/>
         </p:spPr>
         <p:txBody>
-          <a:bodyPr wrap="square" lIns="25400" tIns="12700" rIns="25400" bIns="12700" anchor="ctr">
+          <a:bodyPr wrap="square" anchor="ctr" lIns="25400" rIns="25400" tIns="12700" bIns="12700">
             <a:spAutoFit/>
           </a:bodyPr>
           <a:lstStyle/>
@@ -12073,7 +11763,7 @@
         </p:nvSpPr>
         <p:spPr>
           <a:xfrm>
-            <a:off x="10332720" y="3122516"/>
+            <a:off x="10332720" y="2807208"/>
             <a:ext cx="1325880" cy="713232"/>
           </a:xfrm>
           <a:prstGeom prst="roundRect">
@@ -12110,7 +11800,6 @@
           <a:lstStyle/>
           <a:p>
             <a:pPr algn="ctr"/>
-            <a:endParaRPr/>
           </a:p>
         </p:txBody>
       </p:sp>
@@ -12122,7 +11811,7 @@
         </p:nvSpPr>
         <p:spPr>
           <a:xfrm>
-            <a:off x="10332720" y="3122516"/>
+            <a:off x="10332720" y="2807208"/>
             <a:ext cx="1325880" cy="713232"/>
           </a:xfrm>
           <a:prstGeom prst="rect">
@@ -12131,7 +11820,7 @@
           <a:noFill/>
         </p:spPr>
         <p:txBody>
-          <a:bodyPr wrap="square" lIns="25400" tIns="12700" rIns="25400" bIns="12700" anchor="ctr">
+          <a:bodyPr wrap="square" anchor="ctr" lIns="25400" rIns="25400" tIns="12700" bIns="12700">
             <a:spAutoFit/>
           </a:bodyPr>
           <a:lstStyle/>
@@ -12158,7 +11847,7 @@
         </p:nvSpPr>
         <p:spPr>
           <a:xfrm>
-            <a:off x="1819656" y="3360260"/>
+            <a:off x="1819656" y="3044952"/>
             <a:ext cx="201168" cy="237744"/>
           </a:xfrm>
           <a:prstGeom prst="rightArrow">
@@ -12194,7 +11883,6 @@
           <a:lstStyle/>
           <a:p>
             <a:pPr algn="ctr"/>
-            <a:endParaRPr/>
           </a:p>
         </p:txBody>
       </p:sp>
@@ -12206,7 +11894,7 @@
         </p:nvSpPr>
         <p:spPr>
           <a:xfrm>
-            <a:off x="3328416" y="3360260"/>
+            <a:off x="3328416" y="3044952"/>
             <a:ext cx="246888" cy="237744"/>
           </a:xfrm>
           <a:prstGeom prst="rightArrow">
@@ -12242,7 +11930,6 @@
           <a:lstStyle/>
           <a:p>
             <a:pPr algn="ctr"/>
-            <a:endParaRPr/>
           </a:p>
         </p:txBody>
       </p:sp>
@@ -12254,7 +11941,7 @@
         </p:nvSpPr>
         <p:spPr>
           <a:xfrm>
-            <a:off x="5065776" y="3360260"/>
+            <a:off x="5065776" y="3044952"/>
             <a:ext cx="246887" cy="237744"/>
           </a:xfrm>
           <a:prstGeom prst="rightArrow">
@@ -12290,7 +11977,6 @@
           <a:lstStyle/>
           <a:p>
             <a:pPr algn="ctr"/>
-            <a:endParaRPr/>
           </a:p>
         </p:txBody>
       </p:sp>
@@ -12302,7 +11988,7 @@
         </p:nvSpPr>
         <p:spPr>
           <a:xfrm>
-            <a:off x="6665976" y="3360260"/>
+            <a:off x="6665976" y="3044952"/>
             <a:ext cx="292608" cy="237744"/>
           </a:xfrm>
           <a:prstGeom prst="rightArrow">
@@ -12338,7 +12024,6 @@
           <a:lstStyle/>
           <a:p>
             <a:pPr algn="ctr"/>
-            <a:endParaRPr/>
           </a:p>
         </p:txBody>
       </p:sp>
@@ -12350,7 +12035,7 @@
         </p:nvSpPr>
         <p:spPr>
           <a:xfrm>
-            <a:off x="8403336" y="3360260"/>
+            <a:off x="8403336" y="3044952"/>
             <a:ext cx="246887" cy="237744"/>
           </a:xfrm>
           <a:prstGeom prst="rightArrow">
@@ -12386,7 +12071,6 @@
           <a:lstStyle/>
           <a:p>
             <a:pPr algn="ctr"/>
-            <a:endParaRPr/>
           </a:p>
         </p:txBody>
       </p:sp>
@@ -12398,7 +12082,7 @@
         </p:nvSpPr>
         <p:spPr>
           <a:xfrm>
-            <a:off x="10003536" y="3360260"/>
+            <a:off x="10003536" y="3044952"/>
             <a:ext cx="292608" cy="237744"/>
           </a:xfrm>
           <a:prstGeom prst="rightArrow">
@@ -12434,7 +12118,6 @@
           <a:lstStyle/>
           <a:p>
             <a:pPr algn="ctr"/>
-            <a:endParaRPr/>
           </a:p>
         </p:txBody>
       </p:sp>
@@ -12446,7 +12129,7 @@
         </p:nvSpPr>
         <p:spPr>
           <a:xfrm>
-            <a:off x="3611880" y="3945476"/>
+            <a:off x="3611880" y="3630168"/>
             <a:ext cx="2194560" cy="274320"/>
           </a:xfrm>
           <a:prstGeom prst="rect">
@@ -12455,7 +12138,7 @@
           <a:noFill/>
         </p:spPr>
         <p:txBody>
-          <a:bodyPr wrap="square" lIns="25400" tIns="12700" rIns="25400" bIns="12700" anchor="t">
+          <a:bodyPr wrap="square" anchor="t" lIns="25400" rIns="25400" tIns="12700" bIns="12700">
             <a:spAutoFit/>
           </a:bodyPr>
           <a:lstStyle/>
@@ -12481,7 +12164,7 @@
         </p:nvSpPr>
         <p:spPr>
           <a:xfrm>
-            <a:off x="3611880" y="2738468"/>
+            <a:off x="3611880" y="2423160"/>
             <a:ext cx="914400" cy="274320"/>
           </a:xfrm>
           <a:prstGeom prst="roundRect">
@@ -12516,7 +12199,6 @@
           <a:lstStyle/>
           <a:p>
             <a:pPr algn="ctr"/>
-            <a:endParaRPr/>
           </a:p>
         </p:txBody>
       </p:sp>
@@ -12528,7 +12210,7 @@
         </p:nvSpPr>
         <p:spPr>
           <a:xfrm>
-            <a:off x="3611880" y="2738468"/>
+            <a:off x="3611880" y="2423160"/>
             <a:ext cx="914400" cy="274320"/>
           </a:xfrm>
           <a:prstGeom prst="rect">
@@ -12537,7 +12219,7 @@
           <a:noFill/>
         </p:spPr>
         <p:txBody>
-          <a:bodyPr wrap="square" lIns="25400" tIns="12700" rIns="25400" bIns="12700" anchor="ctr">
+          <a:bodyPr wrap="square" anchor="ctr" lIns="25400" rIns="25400" tIns="12700" bIns="12700">
             <a:spAutoFit/>
           </a:bodyPr>
           <a:lstStyle/>
@@ -12563,7 +12245,7 @@
         </p:nvSpPr>
         <p:spPr>
           <a:xfrm>
-            <a:off x="10332720" y="2738468"/>
+            <a:off x="10332720" y="2423160"/>
             <a:ext cx="1325880" cy="274320"/>
           </a:xfrm>
           <a:prstGeom prst="roundRect">
@@ -12598,7 +12280,6 @@
           <a:lstStyle/>
           <a:p>
             <a:pPr algn="ctr"/>
-            <a:endParaRPr/>
           </a:p>
         </p:txBody>
       </p:sp>
@@ -12610,7 +12291,7 @@
         </p:nvSpPr>
         <p:spPr>
           <a:xfrm>
-            <a:off x="10332720" y="2738468"/>
+            <a:off x="10332720" y="2423160"/>
             <a:ext cx="1325880" cy="274320"/>
           </a:xfrm>
           <a:prstGeom prst="rect">
@@ -12619,7 +12300,7 @@
           <a:noFill/>
         </p:spPr>
         <p:txBody>
-          <a:bodyPr wrap="square" lIns="25400" tIns="12700" rIns="25400" bIns="12700" anchor="ctr">
+          <a:bodyPr wrap="square" anchor="ctr" lIns="25400" rIns="25400" tIns="12700" bIns="12700">
             <a:spAutoFit/>
           </a:bodyPr>
           <a:lstStyle/>
@@ -12645,7 +12326,7 @@
         </p:nvSpPr>
         <p:spPr>
           <a:xfrm>
-            <a:off x="640080" y="4402676"/>
+            <a:off x="640080" y="4087368"/>
             <a:ext cx="5394960" cy="1188720"/>
           </a:xfrm>
           <a:prstGeom prst="rect">
@@ -12686,7 +12367,7 @@
                 </a:solidFill>
                 <a:latin typeface="Apple SD Gothic Neo"/>
               </a:rPr>
-              <a:t>접수: 멱등성 체크 → MySQL 저장 → notifications 발행 → 즉시 응답</a:t>
+              <a:t>접수: 멱등성 체크 → notification outbox와 MySQL 동시 저장 → 즉시 응답</a:t>
             </a:r>
           </a:p>
           <a:p>
@@ -12717,7 +12398,7 @@
                 </a:solidFill>
                 <a:latin typeface="Apple SD Gothic Neo"/>
               </a:rPr>
-              <a:t>발송: Kafka 소비 → 채널별 발송 → delivery-results 발행</a:t>
+              <a:t>발송: pending outbox 발행 → 채널 전송 → delivery result outbox 저장</a:t>
             </a:r>
           </a:p>
         </p:txBody>
@@ -12730,7 +12411,7 @@
         </p:nvSpPr>
         <p:spPr>
           <a:xfrm>
-            <a:off x="6263640" y="4402676"/>
+            <a:off x="6263640" y="4087368"/>
             <a:ext cx="5394960" cy="1188720"/>
           </a:xfrm>
           <a:prstGeom prst="rect">
@@ -12802,7 +12483,7 @@
                 </a:solidFill>
                 <a:latin typeface="Apple SD Gothic Neo"/>
               </a:rPr>
-              <a:t>각 단계는 토픽으로만 통신 → 독립 배포·확장 가능</a:t>
+              <a:t>Outbox는 at-least-once로 재발행하고, downstream 멱등성으로 중복을 관리</a:t>
             </a:r>
           </a:p>
         </p:txBody>
@@ -12824,7 +12505,7 @@
           <a:noFill/>
         </p:spPr>
         <p:txBody>
-          <a:bodyPr wrap="square" lIns="25400" tIns="12700" rIns="25400" bIns="12700" anchor="t">
+          <a:bodyPr wrap="square" anchor="t" lIns="25400" rIns="25400" tIns="12700" bIns="12700">
             <a:spAutoFit/>
           </a:bodyPr>
           <a:lstStyle/>
@@ -12851,7 +12532,7 @@
 </file>
 
 <file path=ppt/slides/slide9.xml><?xml version="1.0" encoding="utf-8"?>
-<p:sld xmlns:a="http://schemas.openxmlformats.org/drawingml/2006/main" xmlns:r="http://schemas.openxmlformats.org/officeDocument/2006/relationships" xmlns:p="http://schemas.openxmlformats.org/presentationml/2006/main">
+<p:sld xmlns:a="http://schemas.openxmlformats.org/drawingml/2006/main" xmlns:p="http://schemas.openxmlformats.org/presentationml/2006/main" xmlns:r="http://schemas.openxmlformats.org/officeDocument/2006/relationships">
   <p:cSld>
     <p:bg>
       <p:bgPr>
@@ -12867,14 +12548,7 @@
         <p:cNvGrpSpPr/>
         <p:nvPr/>
       </p:nvGrpSpPr>
-      <p:grpSpPr>
-        <a:xfrm>
-          <a:off x="0" y="0"/>
-          <a:ext cx="0" cy="0"/>
-          <a:chOff x="0" y="0"/>
-          <a:chExt cx="0" cy="0"/>
-        </a:xfrm>
-      </p:grpSpPr>
+      <p:grpSpPr/>
       <p:sp>
         <p:nvSpPr>
           <p:cNvPr id="2" name="Rectangle 1"/>
@@ -12916,7 +12590,6 @@
           <a:lstStyle/>
           <a:p>
             <a:pPr algn="ctr"/>
-            <a:endParaRPr/>
           </a:p>
         </p:txBody>
       </p:sp>
@@ -12937,7 +12610,7 @@
           <a:noFill/>
         </p:spPr>
         <p:txBody>
-          <a:bodyPr wrap="square" lIns="25400" tIns="12700" rIns="25400" bIns="12700" anchor="t">
+          <a:bodyPr wrap="square" anchor="t" lIns="25400" rIns="25400" tIns="12700" bIns="12700">
             <a:spAutoFit/>
           </a:bodyPr>
           <a:lstStyle/>
@@ -12972,7 +12645,7 @@
           <a:noFill/>
         </p:spPr>
         <p:txBody>
-          <a:bodyPr wrap="square" lIns="25400" tIns="12700" rIns="25400" bIns="12700" anchor="t">
+          <a:bodyPr wrap="square" anchor="t" lIns="25400" rIns="25400" tIns="12700" bIns="12700">
             <a:spAutoFit/>
           </a:bodyPr>
           <a:lstStyle/>
@@ -13035,7 +12708,6 @@
           <a:lstStyle/>
           <a:p>
             <a:pPr algn="ctr"/>
-            <a:endParaRPr/>
           </a:p>
         </p:txBody>
       </p:sp>
@@ -13080,7 +12752,6 @@
           <a:lstStyle/>
           <a:p>
             <a:pPr algn="ctr"/>
-            <a:endParaRPr/>
           </a:p>
         </p:txBody>
       </p:sp>
@@ -13127,7 +12798,7 @@
                 </a:solidFill>
                 <a:latin typeface="Apple SD Gothic Neo"/>
               </a:rPr>
-              <a:t>멱등성·Circuit Breaker·재시도/DLQ·원자적 집계로 '메시지 유실 없고 중복 없는' 발송을 보장</a:t>
+              <a:t>두 Outbox·멱등성·재시도/DLQ·원자적 집계로 유실 위험을 줄이고 at-least-once 발송을 관리</a:t>
             </a:r>
           </a:p>
         </p:txBody>
@@ -13181,7 +12852,7 @@
                 </a:solidFill>
                 <a:latin typeface="Apple SD Gothic Neo"/>
               </a:rPr>
-              <a:t>멱등성 이중 방어: 접수단 Redis 키 + 발송단 notificationId 중복 체크</a:t>
+              <a:t>트랜잭션 Outbox: notification과 delivery result를 DB 저장과 같은 경계에 기록</a:t>
             </a:r>
           </a:p>
           <a:p>
@@ -13212,7 +12883,7 @@
                 </a:solidFill>
                 <a:latin typeface="Apple SD Gothic Neo"/>
               </a:rPr>
-              <a:t>Kafka 발행 신뢰성: fire-and-forget 대신 동기 확인(.get 5초) + 실패 시 예외 전파</a:t>
+              <a:t>중복 방어: 접수단 Redis 키 + delivery_logs.notification_id unique 제약</a:t>
             </a:r>
           </a:p>
           <a:p>
@@ -13296,7 +12967,7 @@
           <a:noFill/>
         </p:spPr>
         <p:txBody>
-          <a:bodyPr wrap="square" lIns="25400" tIns="12700" rIns="25400" bIns="12700" anchor="t">
+          <a:bodyPr wrap="square" anchor="t" lIns="25400" rIns="25400" tIns="12700" bIns="12700">
             <a:spAutoFit/>
           </a:bodyPr>
           <a:lstStyle/>
@@ -13357,7 +13028,6 @@
           <a:lstStyle/>
           <a:p>
             <a:pPr algn="ctr"/>
-            <a:endParaRPr/>
           </a:p>
         </p:txBody>
       </p:sp>
@@ -13378,7 +13048,7 @@
           <a:noFill/>
         </p:spPr>
         <p:txBody>
-          <a:bodyPr wrap="square" lIns="25400" tIns="12700" rIns="25400" bIns="12700" anchor="ctr">
+          <a:bodyPr wrap="square" anchor="ctr" lIns="25400" rIns="25400" tIns="12700" bIns="12700">
             <a:spAutoFit/>
           </a:bodyPr>
           <a:lstStyle/>
@@ -13440,7 +13110,6 @@
           <a:lstStyle/>
           <a:p>
             <a:pPr algn="ctr"/>
-            <a:endParaRPr/>
           </a:p>
         </p:txBody>
       </p:sp>
@@ -13489,7 +13158,6 @@
           <a:lstStyle/>
           <a:p>
             <a:pPr algn="ctr"/>
-            <a:endParaRPr/>
           </a:p>
         </p:txBody>
       </p:sp>
@@ -13510,7 +13178,7 @@
           <a:noFill/>
         </p:spPr>
         <p:txBody>
-          <a:bodyPr wrap="square" lIns="25400" tIns="12700" rIns="25400" bIns="12700" anchor="ctr">
+          <a:bodyPr wrap="square" anchor="ctr" lIns="25400" rIns="25400" tIns="12700" bIns="12700">
             <a:spAutoFit/>
           </a:bodyPr>
           <a:lstStyle/>
@@ -13572,7 +13240,6 @@
           <a:lstStyle/>
           <a:p>
             <a:pPr algn="ctr"/>
-            <a:endParaRPr/>
           </a:p>
         </p:txBody>
       </p:sp>
@@ -13621,7 +13288,6 @@
           <a:lstStyle/>
           <a:p>
             <a:pPr algn="ctr"/>
-            <a:endParaRPr/>
           </a:p>
         </p:txBody>
       </p:sp>
@@ -13642,7 +13308,7 @@
           <a:noFill/>
         </p:spPr>
         <p:txBody>
-          <a:bodyPr wrap="square" lIns="25400" tIns="12700" rIns="25400" bIns="12700" anchor="ctr">
+          <a:bodyPr wrap="square" anchor="ctr" lIns="25400" rIns="25400" tIns="12700" bIns="12700">
             <a:spAutoFit/>
           </a:bodyPr>
           <a:lstStyle/>
@@ -13704,7 +13370,6 @@
           <a:lstStyle/>
           <a:p>
             <a:pPr algn="ctr"/>
-            <a:endParaRPr/>
           </a:p>
         </p:txBody>
       </p:sp>
@@ -13753,7 +13418,6 @@
           <a:lstStyle/>
           <a:p>
             <a:pPr algn="ctr"/>
-            <a:endParaRPr/>
           </a:p>
         </p:txBody>
       </p:sp>
@@ -13774,7 +13438,7 @@
           <a:noFill/>
         </p:spPr>
         <p:txBody>
-          <a:bodyPr wrap="square" lIns="25400" tIns="12700" rIns="25400" bIns="12700" anchor="ctr">
+          <a:bodyPr wrap="square" anchor="ctr" lIns="25400" rIns="25400" tIns="12700" bIns="12700">
             <a:spAutoFit/>
           </a:bodyPr>
           <a:lstStyle/>
@@ -13836,7 +13500,6 @@
           <a:lstStyle/>
           <a:p>
             <a:pPr algn="ctr"/>
-            <a:endParaRPr/>
           </a:p>
         </p:txBody>
       </p:sp>
@@ -13883,7 +13546,6 @@
           <a:lstStyle/>
           <a:p>
             <a:pPr algn="ctr"/>
-            <a:endParaRPr/>
           </a:p>
         </p:txBody>
       </p:sp>
@@ -13904,7 +13566,7 @@
           <a:noFill/>
         </p:spPr>
         <p:txBody>
-          <a:bodyPr wrap="square" lIns="25400" tIns="12700" rIns="25400" bIns="12700" anchor="ctr">
+          <a:bodyPr wrap="square" anchor="ctr" lIns="25400" rIns="25400" tIns="12700" bIns="12700">
             <a:spAutoFit/>
           </a:bodyPr>
           <a:lstStyle/>
@@ -13939,7 +13601,7 @@
           <a:noFill/>
         </p:spPr>
         <p:txBody>
-          <a:bodyPr wrap="square" lIns="25400" tIns="12700" rIns="25400" bIns="12700" anchor="t">
+          <a:bodyPr wrap="square" anchor="t" lIns="25400" rIns="25400" tIns="12700" bIns="12700">
             <a:spAutoFit/>
           </a:bodyPr>
           <a:lstStyle/>
@@ -13998,7 +13660,6 @@
           <a:lstStyle/>
           <a:p>
             <a:pPr algn="ctr"/>
-            <a:endParaRPr/>
           </a:p>
         </p:txBody>
       </p:sp>
@@ -14019,7 +13680,7 @@
           <a:noFill/>
         </p:spPr>
         <p:txBody>
-          <a:bodyPr wrap="square" lIns="25400" tIns="12700" rIns="25400" bIns="12700" anchor="ctr">
+          <a:bodyPr wrap="square" anchor="ctr" lIns="25400" rIns="25400" tIns="12700" bIns="12700">
             <a:spAutoFit/>
           </a:bodyPr>
           <a:lstStyle/>
@@ -14078,7 +13739,6 @@
           <a:lstStyle/>
           <a:p>
             <a:pPr algn="ctr"/>
-            <a:endParaRPr/>
           </a:p>
         </p:txBody>
       </p:sp>
@@ -14099,7 +13759,7 @@
           <a:noFill/>
         </p:spPr>
         <p:txBody>
-          <a:bodyPr wrap="square" lIns="25400" tIns="12700" rIns="25400" bIns="12700" anchor="ctr">
+          <a:bodyPr wrap="square" anchor="ctr" lIns="25400" rIns="25400" tIns="12700" bIns="12700">
             <a:spAutoFit/>
           </a:bodyPr>
           <a:lstStyle/>
@@ -14158,7 +13818,6 @@
           <a:lstStyle/>
           <a:p>
             <a:pPr algn="ctr"/>
-            <a:endParaRPr/>
           </a:p>
         </p:txBody>
       </p:sp>
@@ -14179,7 +13838,7 @@
           <a:noFill/>
         </p:spPr>
         <p:txBody>
-          <a:bodyPr wrap="square" lIns="25400" tIns="12700" rIns="25400" bIns="12700" anchor="ctr">
+          <a:bodyPr wrap="square" anchor="ctr" lIns="25400" rIns="25400" tIns="12700" bIns="12700">
             <a:spAutoFit/>
           </a:bodyPr>
           <a:lstStyle/>
@@ -14250,7 +13909,7 @@
           <a:noFill/>
         </p:spPr>
         <p:txBody>
-          <a:bodyPr wrap="square" lIns="25400" tIns="12700" rIns="25400" bIns="12700" anchor="t">
+          <a:bodyPr wrap="square" anchor="t" lIns="25400" rIns="25400" tIns="12700" bIns="12700">
             <a:spAutoFit/>
           </a:bodyPr>
           <a:lstStyle/>
@@ -14321,7 +13980,7 @@
           <a:noFill/>
         </p:spPr>
         <p:txBody>
-          <a:bodyPr wrap="square" lIns="25400" tIns="12700" rIns="25400" bIns="12700" anchor="t">
+          <a:bodyPr wrap="square" anchor="t" lIns="25400" rIns="25400" tIns="12700" bIns="12700">
             <a:spAutoFit/>
           </a:bodyPr>
           <a:lstStyle/>
@@ -14392,7 +14051,7 @@
           <a:noFill/>
         </p:spPr>
         <p:txBody>
-          <a:bodyPr wrap="square" lIns="25400" tIns="12700" rIns="25400" bIns="12700" anchor="t">
+          <a:bodyPr wrap="square" anchor="t" lIns="25400" rIns="25400" tIns="12700" bIns="12700">
             <a:spAutoFit/>
           </a:bodyPr>
           <a:lstStyle/>
@@ -14427,7 +14086,7 @@
           <a:noFill/>
         </p:spPr>
         <p:txBody>
-          <a:bodyPr wrap="square" lIns="25400" tIns="12700" rIns="25400" bIns="12700" anchor="t">
+          <a:bodyPr wrap="square" anchor="t" lIns="25400" rIns="25400" tIns="12700" bIns="12700">
             <a:spAutoFit/>
           </a:bodyPr>
           <a:lstStyle/>
@@ -14774,7 +14433,7 @@
 </file>
 
 <file path=ppt/theme/theme2.xml><?xml version="1.0" encoding="utf-8"?>
-<a:theme xmlns:a="http://schemas.openxmlformats.org/drawingml/2006/main" name="Office 테마">
+<a:theme xmlns:a="http://schemas.openxmlformats.org/drawingml/2006/main" name="Office Theme">
   <a:themeElements>
     <a:clrScheme name="Office">
       <a:dk1>
@@ -14784,44 +14443,44 @@
         <a:sysClr val="window" lastClr="FFFFFF"/>
       </a:lt1>
       <a:dk2>
-        <a:srgbClr val="44546A"/>
+        <a:srgbClr val="1F497D"/>
       </a:dk2>
       <a:lt2>
-        <a:srgbClr val="E7E6E6"/>
+        <a:srgbClr val="EEECE1"/>
       </a:lt2>
       <a:accent1>
-        <a:srgbClr val="4472C4"/>
+        <a:srgbClr val="4F81BD"/>
       </a:accent1>
       <a:accent2>
-        <a:srgbClr val="ED7D31"/>
+        <a:srgbClr val="C0504D"/>
       </a:accent2>
       <a:accent3>
-        <a:srgbClr val="A5A5A5"/>
+        <a:srgbClr val="9BBB59"/>
       </a:accent3>
       <a:accent4>
-        <a:srgbClr val="FFC000"/>
+        <a:srgbClr val="8064A2"/>
       </a:accent4>
       <a:accent5>
-        <a:srgbClr val="5B9BD5"/>
+        <a:srgbClr val="4BACC6"/>
       </a:accent5>
       <a:accent6>
-        <a:srgbClr val="70AD47"/>
+        <a:srgbClr val="F79646"/>
       </a:accent6>
       <a:hlink>
-        <a:srgbClr val="0563C1"/>
+        <a:srgbClr val="0000FF"/>
       </a:hlink>
       <a:folHlink>
-        <a:srgbClr val="954F72"/>
+        <a:srgbClr val="800080"/>
       </a:folHlink>
     </a:clrScheme>
     <a:fontScheme name="Office">
       <a:majorFont>
-        <a:latin typeface="맑은 고딕" panose="020F0302020204030204"/>
+        <a:latin typeface="Calibri"/>
         <a:ea typeface=""/>
         <a:cs typeface=""/>
-        <a:font script="Jpan" typeface="游ゴシック Light"/>
+        <a:font script="Jpan" typeface="ＭＳ Ｐゴシック"/>
         <a:font script="Hang" typeface="맑은 고딕"/>
-        <a:font script="Hans" typeface="等线 Light"/>
+        <a:font script="Hans" typeface="宋体"/>
         <a:font script="Hant" typeface="新細明體"/>
         <a:font script="Arab" typeface="Times New Roman"/>
         <a:font script="Hebr" typeface="Times New Roman"/>
@@ -14849,31 +14508,14 @@
         <a:font script="Viet" typeface="Times New Roman"/>
         <a:font script="Uigh" typeface="Microsoft Uighur"/>
         <a:font script="Geor" typeface="Sylfaen"/>
-        <a:font script="Armn" typeface="Arial"/>
-        <a:font script="Bugi" typeface="Leelawadee UI"/>
-        <a:font script="Bopo" typeface="Microsoft JhengHei"/>
-        <a:font script="Java" typeface="Javanese Text"/>
-        <a:font script="Lisu" typeface="Segoe UI"/>
-        <a:font script="Mymr" typeface="Myanmar Text"/>
-        <a:font script="Nkoo" typeface="Ebrima"/>
-        <a:font script="Olck" typeface="Nirmala UI"/>
-        <a:font script="Osma" typeface="Ebrima"/>
-        <a:font script="Phag" typeface="Phagspa"/>
-        <a:font script="Syrn" typeface="Estrangelo Edessa"/>
-        <a:font script="Syrj" typeface="Estrangelo Edessa"/>
-        <a:font script="Syre" typeface="Estrangelo Edessa"/>
-        <a:font script="Sora" typeface="Nirmala UI"/>
-        <a:font script="Tale" typeface="Microsoft Tai Le"/>
-        <a:font script="Talu" typeface="Microsoft New Tai Lue"/>
-        <a:font script="Tfng" typeface="Ebrima"/>
       </a:majorFont>
       <a:minorFont>
-        <a:latin typeface="맑은 고딕" panose="020F0502020204030204"/>
+        <a:latin typeface="Calibri"/>
         <a:ea typeface=""/>
         <a:cs typeface=""/>
-        <a:font script="Jpan" typeface="游ゴシック"/>
+        <a:font script="Jpan" typeface="ＭＳ Ｐゴシック"/>
         <a:font script="Hang" typeface="맑은 고딕"/>
-        <a:font script="Hans" typeface="等线"/>
+        <a:font script="Hans" typeface="宋体"/>
         <a:font script="Hant" typeface="新細明體"/>
         <a:font script="Arab" typeface="Arial"/>
         <a:font script="Hebr" typeface="Arial"/>
@@ -14901,23 +14543,6 @@
         <a:font script="Viet" typeface="Arial"/>
         <a:font script="Uigh" typeface="Microsoft Uighur"/>
         <a:font script="Geor" typeface="Sylfaen"/>
-        <a:font script="Armn" typeface="Arial"/>
-        <a:font script="Bugi" typeface="Leelawadee UI"/>
-        <a:font script="Bopo" typeface="Microsoft JhengHei"/>
-        <a:font script="Java" typeface="Javanese Text"/>
-        <a:font script="Lisu" typeface="Segoe UI"/>
-        <a:font script="Mymr" typeface="Myanmar Text"/>
-        <a:font script="Nkoo" typeface="Ebrima"/>
-        <a:font script="Olck" typeface="Nirmala UI"/>
-        <a:font script="Osma" typeface="Ebrima"/>
-        <a:font script="Phag" typeface="Phagspa"/>
-        <a:font script="Syrn" typeface="Estrangelo Edessa"/>
-        <a:font script="Syrj" typeface="Estrangelo Edessa"/>
-        <a:font script="Syre" typeface="Estrangelo Edessa"/>
-        <a:font script="Sora" typeface="Nirmala UI"/>
-        <a:font script="Tale" typeface="Microsoft Tai Le"/>
-        <a:font script="Talu" typeface="Microsoft New Tai Lue"/>
-        <a:font script="Tfng" typeface="Ebrima"/>
       </a:minorFont>
     </a:fontScheme>
     <a:fmtScheme name="Office">
@@ -14929,141 +14554,200 @@
           <a:gsLst>
             <a:gs pos="0">
               <a:schemeClr val="phClr">
-                <a:lumMod val="110000"/>
-                <a:satMod val="105000"/>
-                <a:tint val="67000"/>
+                <a:tint val="50000"/>
+                <a:satMod val="300000"/>
               </a:schemeClr>
             </a:gs>
-            <a:gs pos="50000">
+            <a:gs pos="35000">
               <a:schemeClr val="phClr">
-                <a:lumMod val="105000"/>
-                <a:satMod val="103000"/>
-                <a:tint val="73000"/>
+                <a:tint val="37000"/>
+                <a:satMod val="300000"/>
               </a:schemeClr>
             </a:gs>
             <a:gs pos="100000">
               <a:schemeClr val="phClr">
-                <a:lumMod val="105000"/>
-                <a:satMod val="109000"/>
-                <a:tint val="81000"/>
+                <a:tint val="15000"/>
+                <a:satMod val="350000"/>
               </a:schemeClr>
             </a:gs>
           </a:gsLst>
-          <a:lin ang="5400000" scaled="0"/>
+          <a:lin ang="16200000" scaled="1"/>
         </a:gradFill>
         <a:gradFill rotWithShape="1">
           <a:gsLst>
             <a:gs pos="0">
               <a:schemeClr val="phClr">
-                <a:satMod val="103000"/>
-                <a:lumMod val="102000"/>
-                <a:tint val="94000"/>
-              </a:schemeClr>
-            </a:gs>
-            <a:gs pos="50000">
-              <a:schemeClr val="phClr">
-                <a:satMod val="110000"/>
-                <a:lumMod val="100000"/>
+                <a:tint val="100000"/>
                 <a:shade val="100000"/>
+                <a:satMod val="130000"/>
               </a:schemeClr>
             </a:gs>
             <a:gs pos="100000">
               <a:schemeClr val="phClr">
-                <a:lumMod val="99000"/>
-                <a:satMod val="120000"/>
-                <a:shade val="78000"/>
+                <a:tint val="50000"/>
+                <a:shade val="100000"/>
+                <a:satMod val="350000"/>
               </a:schemeClr>
             </a:gs>
           </a:gsLst>
-          <a:lin ang="5400000" scaled="0"/>
+          <a:lin ang="16200000" scaled="0"/>
         </a:gradFill>
       </a:fillStyleLst>
       <a:lnStyleLst>
-        <a:ln w="6350" cap="flat" cmpd="sng" algn="ctr">
+        <a:ln w="9525" cap="flat" cmpd="sng" algn="ctr">
+          <a:solidFill>
+            <a:schemeClr val="phClr">
+              <a:shade val="95000"/>
+              <a:satMod val="105000"/>
+            </a:schemeClr>
+          </a:solidFill>
+          <a:prstDash val="solid"/>
+        </a:ln>
+        <a:ln w="25400" cap="flat" cmpd="sng" algn="ctr">
           <a:solidFill>
             <a:schemeClr val="phClr"/>
           </a:solidFill>
           <a:prstDash val="solid"/>
-          <a:miter lim="800000"/>
         </a:ln>
-        <a:ln w="12700" cap="flat" cmpd="sng" algn="ctr">
+        <a:ln w="38100" cap="flat" cmpd="sng" algn="ctr">
           <a:solidFill>
             <a:schemeClr val="phClr"/>
           </a:solidFill>
           <a:prstDash val="solid"/>
-          <a:miter lim="800000"/>
-        </a:ln>
-        <a:ln w="19050" cap="flat" cmpd="sng" algn="ctr">
-          <a:solidFill>
-            <a:schemeClr val="phClr"/>
-          </a:solidFill>
-          <a:prstDash val="solid"/>
-          <a:miter lim="800000"/>
         </a:ln>
       </a:lnStyleLst>
       <a:effectStyleLst>
         <a:effectStyle>
-          <a:effectLst/>
-        </a:effectStyle>
-        <a:effectStyle>
-          <a:effectLst/>
+          <a:effectLst>
+            <a:outerShdw blurRad="40000" dist="20000" dir="5400000" rotWithShape="0">
+              <a:srgbClr val="000000">
+                <a:alpha val="38000"/>
+              </a:srgbClr>
+            </a:outerShdw>
+          </a:effectLst>
         </a:effectStyle>
         <a:effectStyle>
           <a:effectLst>
-            <a:outerShdw blurRad="57150" dist="19050" dir="5400000" algn="ctr" rotWithShape="0">
+            <a:outerShdw blurRad="40000" dist="23000" dir="5400000" rotWithShape="0">
               <a:srgbClr val="000000">
-                <a:alpha val="63000"/>
+                <a:alpha val="35000"/>
               </a:srgbClr>
             </a:outerShdw>
           </a:effectLst>
+        </a:effectStyle>
+        <a:effectStyle>
+          <a:effectLst>
+            <a:outerShdw blurRad="40000" dist="23000" dir="5400000" rotWithShape="0">
+              <a:srgbClr val="000000">
+                <a:alpha val="35000"/>
+              </a:srgbClr>
+            </a:outerShdw>
+          </a:effectLst>
+          <a:scene3d>
+            <a:camera prst="orthographicFront">
+              <a:rot lat="0" lon="0" rev="0"/>
+            </a:camera>
+            <a:lightRig rig="threePt" dir="t">
+              <a:rot lat="0" lon="0" rev="1200000"/>
+            </a:lightRig>
+          </a:scene3d>
+          <a:sp3d>
+            <a:bevelT w="63500" h="25400"/>
+          </a:sp3d>
         </a:effectStyle>
       </a:effectStyleLst>
       <a:bgFillStyleLst>
         <a:solidFill>
           <a:schemeClr val="phClr"/>
         </a:solidFill>
-        <a:solidFill>
-          <a:schemeClr val="phClr">
-            <a:tint val="95000"/>
-            <a:satMod val="170000"/>
-          </a:schemeClr>
-        </a:solidFill>
         <a:gradFill rotWithShape="1">
           <a:gsLst>
             <a:gs pos="0">
               <a:schemeClr val="phClr">
-                <a:tint val="93000"/>
-                <a:satMod val="150000"/>
-                <a:shade val="98000"/>
-                <a:lumMod val="102000"/>
+                <a:tint val="40000"/>
+                <a:satMod val="350000"/>
               </a:schemeClr>
             </a:gs>
-            <a:gs pos="50000">
+            <a:gs pos="40000">
               <a:schemeClr val="phClr">
-                <a:tint val="98000"/>
-                <a:satMod val="130000"/>
-                <a:shade val="90000"/>
-                <a:lumMod val="103000"/>
+                <a:tint val="45000"/>
+                <a:shade val="99000"/>
+                <a:satMod val="350000"/>
               </a:schemeClr>
             </a:gs>
             <a:gs pos="100000">
               <a:schemeClr val="phClr">
-                <a:shade val="63000"/>
-                <a:satMod val="120000"/>
+                <a:shade val="20000"/>
+                <a:satMod val="255000"/>
               </a:schemeClr>
             </a:gs>
           </a:gsLst>
-          <a:lin ang="5400000" scaled="0"/>
+          <a:path path="circle">
+            <a:fillToRect l="50000" t="-80000" r="50000" b="180000"/>
+          </a:path>
+        </a:gradFill>
+        <a:gradFill rotWithShape="1">
+          <a:gsLst>
+            <a:gs pos="0">
+              <a:schemeClr val="phClr">
+                <a:tint val="80000"/>
+                <a:satMod val="300000"/>
+              </a:schemeClr>
+            </a:gs>
+            <a:gs pos="100000">
+              <a:schemeClr val="phClr">
+                <a:shade val="30000"/>
+                <a:satMod val="200000"/>
+              </a:schemeClr>
+            </a:gs>
+          </a:gsLst>
+          <a:path path="circle">
+            <a:fillToRect l="50000" t="50000" r="50000" b="50000"/>
+          </a:path>
         </a:gradFill>
       </a:bgFillStyleLst>
     </a:fmtScheme>
   </a:themeElements>
-  <a:objectDefaults/>
+  <a:objectDefaults>
+    <a:spDef>
+      <a:spPr/>
+      <a:bodyPr/>
+      <a:lstStyle/>
+      <a:style>
+        <a:lnRef idx="1">
+          <a:schemeClr val="accent1"/>
+        </a:lnRef>
+        <a:fillRef idx="3">
+          <a:schemeClr val="accent1"/>
+        </a:fillRef>
+        <a:effectRef idx="2">
+          <a:schemeClr val="accent1"/>
+        </a:effectRef>
+        <a:fontRef idx="minor">
+          <a:schemeClr val="lt1"/>
+        </a:fontRef>
+      </a:style>
+    </a:spDef>
+    <a:lnDef>
+      <a:spPr/>
+      <a:bodyPr/>
+      <a:lstStyle/>
+      <a:style>
+        <a:lnRef idx="2">
+          <a:schemeClr val="accent1"/>
+        </a:lnRef>
+        <a:fillRef idx="0">
+          <a:schemeClr val="accent1"/>
+        </a:fillRef>
+        <a:effectRef idx="1">
+          <a:schemeClr val="accent1"/>
+        </a:effectRef>
+        <a:fontRef idx="minor">
+          <a:schemeClr val="tx1"/>
+        </a:fontRef>
+      </a:style>
+    </a:lnDef>
+  </a:objectDefaults>
   <a:extraClrSchemeLst/>
-  <a:extLst>
-    <a:ext uri="{05A4C25C-085E-4340-85A3-A5531E510DB2}">
-      <thm15:themeFamily xmlns:thm15="http://schemas.microsoft.com/office/thememl/2012/main" name="Office Theme" id="{62F939B6-93AF-4DB8-9C6B-D6C7DFDC589F}" vid="{4A3C46E8-61CC-4603-A589-7422A47A8E4A}"/>
-    </a:ext>
-  </a:extLst>
 </a:theme>
 </file>